--- a/skills/uav-paper-report/assets/examples/uav-spot-regression-report.pptx
+++ b/skills/uav-paper-report/assets/examples/uav-spot-regression-report.pptx
@@ -9305,8 +9305,8 @@
         </p:nvSpPr>
         <p:spPr>
           <a:xfrm>
-            <a:off x="694944" y="1591056"/>
-            <a:ext cx="4754880" cy="292608"/>
+            <a:off x="713232" y="1572768"/>
+            <a:ext cx="4754880" cy="310896"/>
           </a:xfrm>
           <a:prstGeom prst="rect">
             <a:avLst/>
@@ -9314,7 +9314,7 @@
           <a:noFill/>
         </p:spPr>
         <p:txBody>
-          <a:bodyPr wrap="square" lIns="0" rIns="0" tIns="0" bIns="0">
+          <a:bodyPr wrap="square" lIns="18288" rIns="18288" tIns="18288" bIns="18288">
             <a:spAutoFit/>
           </a:bodyPr>
           <a:lstStyle/>
@@ -9331,9 +9331,9 @@
               </a:spcAft>
             </a:pPr>
             <a:r>
-              <a:rPr sz="1900" b="1">
-                <a:solidFill>
-                  <a:srgbClr val="4E4E4E"/>
+              <a:rPr sz="2100" b="1">
+                <a:solidFill>
+                  <a:srgbClr val="525860"/>
                 </a:solidFill>
                 <a:latin typeface="Times New Roman"/>
                 <a:ea typeface="Times New Roman"/>
@@ -9352,8 +9352,8 @@
         </p:nvSpPr>
         <p:spPr>
           <a:xfrm>
-            <a:off x="658368" y="1920240"/>
-            <a:ext cx="10899648" cy="1828800"/>
+            <a:off x="713232" y="1901952"/>
+            <a:ext cx="5074920" cy="1664208"/>
           </a:xfrm>
           <a:prstGeom prst="rect">
             <a:avLst/>
@@ -9361,128 +9361,139 @@
           <a:noFill/>
         </p:spPr>
         <p:txBody>
-          <a:bodyPr wrap="square" lIns="0" rIns="0" tIns="0" bIns="0">
+          <a:bodyPr wrap="square" lIns="18288" rIns="18288" tIns="18288" bIns="18288">
             <a:spAutoFit/>
           </a:bodyPr>
           <a:lstStyle/>
           <a:p>
             <a:pPr algn="l" marL="210000" indent="-140000">
               <a:lnSpc>
-                <a:spcPct val="105000"/>
-              </a:lnSpc>
-              <a:spcBef>
-                <a:spcPts val="0"/>
-              </a:spcBef>
-              <a:spcAft>
-                <a:spcPts val="55"/>
+                <a:spcPct val="92000"/>
+              </a:lnSpc>
+              <a:spcBef>
+                <a:spcPts val="0"/>
+              </a:spcBef>
+              <a:spcAft>
+                <a:spcPts val="15"/>
               </a:spcAft>
             </a:pPr>
             <a:r>
               <a:rPr sz="1920" b="1">
                 <a:solidFill>
-                  <a:srgbClr val="000000"/>
-                </a:solidFill>
-                <a:latin typeface="Times New Roman"/>
-                <a:ea typeface="Times New Roman"/>
-                <a:cs typeface="Times New Roman"/>
-              </a:rPr>
-              <a:t>● 时空建模直接处理动⁠态⁠障⁠碍未来占用。</a:t>
-            </a:r>
-          </a:p>
-          <a:p>
-            <a:pPr algn="l" marL="350000" indent="-120000">
-              <a:lnSpc>
-                <a:spcPct val="105000"/>
-              </a:lnSpc>
-              <a:spcBef>
-                <a:spcPts val="0"/>
-              </a:spcBef>
-              <a:spcAft>
-                <a:spcPts val="55"/>
+                  <a:srgbClr val="191919"/>
+                </a:solidFill>
+                <a:latin typeface="Times New Roman"/>
+                <a:ea typeface="Times New Roman"/>
+                <a:cs typeface="Times New Roman"/>
+              </a:rPr>
+              <a:t>● 时空建模直接处理动态障碍未来占用。</a:t>
+            </a:r>
+          </a:p>
+          <a:p>
+            <a:pPr marL="350000" indent="-120000">
+              <a:lnSpc>
+                <a:spcPct val="92000"/>
+              </a:lnSpc>
+              <a:spcAft>
+                <a:spcPts val="15"/>
               </a:spcAft>
             </a:pPr>
             <a:r>
               <a:rPr sz="1840" b="0">
                 <a:solidFill>
-                  <a:srgbClr val="000000"/>
-                </a:solidFill>
-                <a:latin typeface="Times New Roman"/>
-                <a:ea typeface="Times New Roman"/>
-                <a:cs typeface="Times New Roman"/>
-              </a:rPr>
-              <a:t>• 无地图框架减少ESDF/粒子地图等维护开销。</a:t>
-            </a:r>
-          </a:p>
-          <a:p>
-            <a:pPr algn="l" marL="350000" indent="-120000">
-              <a:lnSpc>
-                <a:spcPct val="105000"/>
-              </a:lnSpc>
-              <a:spcBef>
-                <a:spcPts val="0"/>
-              </a:spcBef>
-              <a:spcAft>
-                <a:spcPts val="55"/>
+                  <a:srgbClr val="191919"/>
+                </a:solidFill>
+                <a:latin typeface="Times New Roman"/>
+                <a:ea typeface="Times New Roman"/>
+                <a:cs typeface="Times New Roman"/>
+              </a:rPr>
+              <a:t>• 无地图框架减少 ESDF / 粒子地图等维护开销。</a:t>
+            </a:r>
+          </a:p>
+          <a:p>
+            <a:pPr marL="350000" indent="-120000">
+              <a:lnSpc>
+                <a:spcPct val="92000"/>
+              </a:lnSpc>
+              <a:spcAft>
+                <a:spcPts val="15"/>
               </a:spcAft>
             </a:pPr>
             <a:r>
               <a:rPr sz="1840" b="0">
                 <a:solidFill>
-                  <a:srgbClr val="000000"/>
-                </a:solidFill>
-                <a:latin typeface="Times New Roman"/>
-                <a:ea typeface="Times New Roman"/>
-                <a:cs typeface="Times New Roman"/>
-              </a:rPr>
-              <a:t>• backup模块提升高密度动⁠态⁠障⁠碍下的安全性。</a:t>
-            </a:r>
-          </a:p>
-          <a:p>
-            <a:pPr algn="l" marL="350000" indent="-120000">
-              <a:lnSpc>
-                <a:spcPct val="105000"/>
-              </a:lnSpc>
-              <a:spcBef>
-                <a:spcPts val="0"/>
-              </a:spcBef>
-              <a:spcAft>
-                <a:spcPts val="55"/>
-              </a:spcAft>
-            </a:pPr>
+                  <a:srgbClr val="191919"/>
+                </a:solidFill>
+                <a:latin typeface="Times New Roman"/>
+                <a:ea typeface="Times New Roman"/>
+                <a:cs typeface="Times New Roman"/>
+              </a:rPr>
+              <a:t>• </a:t>
+            </a:r>
+            <a:r>
+              <a:rPr sz="1840" b="1">
+                <a:solidFill>
+                  <a:srgbClr val="DC1423"/>
+                </a:solidFill>
+                <a:latin typeface="Times New Roman"/>
+                <a:ea typeface="Times New Roman"/>
+                <a:cs typeface="Times New Roman"/>
+              </a:rPr>
+              <a:t>backup</a:t>
+            </a:r>
             <a:r>
               <a:rPr sz="1840" b="0">
                 <a:solidFill>
-                  <a:srgbClr val="000000"/>
-                </a:solidFill>
-                <a:latin typeface="Times New Roman"/>
-                <a:ea typeface="Times New Roman"/>
-                <a:cs typeface="Times New Roman"/>
-              </a:rPr>
-              <a:t>• 仿真、PX4 SITL和实机结果覆盖较完整的验证链路。</a:t>
-            </a:r>
-          </a:p>
-          <a:p>
-            <a:pPr algn="l" marL="350000" indent="-120000">
-              <a:lnSpc>
-                <a:spcPct val="105000"/>
-              </a:lnSpc>
-              <a:spcBef>
-                <a:spcPts val="0"/>
-              </a:spcBef>
-              <a:spcAft>
-                <a:spcPts val="55"/>
-              </a:spcAft>
-            </a:pPr>
+                  <a:srgbClr val="191919"/>
+                </a:solidFill>
+                <a:latin typeface="Times New Roman"/>
+                <a:ea typeface="Times New Roman"/>
+                <a:cs typeface="Times New Roman"/>
+              </a:rPr>
+              <a:t> 模块提升高密度动态障碍下的</a:t>
+            </a:r>
+            <a:r>
+              <a:rPr sz="1840" b="1">
+                <a:solidFill>
+                  <a:srgbClr val="DC1423"/>
+                </a:solidFill>
+                <a:latin typeface="Times New Roman"/>
+                <a:ea typeface="Times New Roman"/>
+                <a:cs typeface="Times New Roman"/>
+              </a:rPr>
+              <a:t>安全性</a:t>
+            </a:r>
             <a:r>
               <a:rPr sz="1840" b="0">
                 <a:solidFill>
-                  <a:srgbClr val="000000"/>
-                </a:solidFill>
-                <a:latin typeface="Times New Roman"/>
-                <a:ea typeface="Times New Roman"/>
-                <a:cs typeface="Times New Roman"/>
-              </a:rPr>
-              <a:t>• 方法链条从感知到控制保持在线闭环，适合机载算力受限的平台。</a:t>
+                  <a:srgbClr val="191919"/>
+                </a:solidFill>
+                <a:latin typeface="Times New Roman"/>
+                <a:ea typeface="Times New Roman"/>
+                <a:cs typeface="Times New Roman"/>
+              </a:rPr>
+              <a:t>。</a:t>
+            </a:r>
+          </a:p>
+          <a:p>
+            <a:pPr marL="350000" indent="-120000">
+              <a:lnSpc>
+                <a:spcPct val="92000"/>
+              </a:lnSpc>
+              <a:spcAft>
+                <a:spcPts val="15"/>
+              </a:spcAft>
+            </a:pPr>
+            <a:r>
+              <a:rPr sz="1840" b="0">
+                <a:solidFill>
+                  <a:srgbClr val="191919"/>
+                </a:solidFill>
+                <a:latin typeface="Times New Roman"/>
+                <a:ea typeface="Times New Roman"/>
+                <a:cs typeface="Times New Roman"/>
+              </a:rPr>
+              <a:t>• 仿真、PX4 SITL 和实机结果覆盖较完整验证链路。</a:t>
             </a:r>
           </a:p>
         </p:txBody>
@@ -9495,8 +9506,8 @@
         </p:nvSpPr>
         <p:spPr>
           <a:xfrm>
-            <a:off x="694944" y="3822191"/>
-            <a:ext cx="10808208" cy="16459"/>
+            <a:off x="713232" y="3822191"/>
+            <a:ext cx="10771632" cy="18288"/>
           </a:xfrm>
           <a:prstGeom prst="rect">
             <a:avLst/>
@@ -9531,8 +9542,8 @@
         </p:nvSpPr>
         <p:spPr>
           <a:xfrm>
-            <a:off x="694944" y="3986784"/>
-            <a:ext cx="4754880" cy="292608"/>
+            <a:off x="6272784" y="1572768"/>
+            <a:ext cx="4754880" cy="310896"/>
           </a:xfrm>
           <a:prstGeom prst="rect">
             <a:avLst/>
@@ -9540,7 +9551,7 @@
           <a:noFill/>
         </p:spPr>
         <p:txBody>
-          <a:bodyPr wrap="square" lIns="0" rIns="0" tIns="0" bIns="0">
+          <a:bodyPr wrap="square" lIns="18288" rIns="18288" tIns="18288" bIns="18288">
             <a:spAutoFit/>
           </a:bodyPr>
           <a:lstStyle/>
@@ -9557,9 +9568,9 @@
               </a:spcAft>
             </a:pPr>
             <a:r>
-              <a:rPr sz="1900" b="1">
-                <a:solidFill>
-                  <a:srgbClr val="4E4E4E"/>
+              <a:rPr sz="2100" b="1">
+                <a:solidFill>
+                  <a:srgbClr val="525860"/>
                 </a:solidFill>
                 <a:latin typeface="Times New Roman"/>
                 <a:ea typeface="Times New Roman"/>
@@ -9578,8 +9589,8 @@
         </p:nvSpPr>
         <p:spPr>
           <a:xfrm>
-            <a:off x="658368" y="4315968"/>
-            <a:ext cx="10899648" cy="1865376"/>
+            <a:off x="6272784" y="1901952"/>
+            <a:ext cx="5074920" cy="1664208"/>
           </a:xfrm>
           <a:prstGeom prst="rect">
             <a:avLst/>
@@ -9587,122 +9598,133 @@
           <a:noFill/>
         </p:spPr>
         <p:txBody>
-          <a:bodyPr wrap="square" lIns="0" rIns="0" tIns="0" bIns="0">
+          <a:bodyPr wrap="square" lIns="18288" rIns="18288" tIns="18288" bIns="18288">
             <a:spAutoFit/>
           </a:bodyPr>
           <a:lstStyle/>
           <a:p>
             <a:pPr algn="l" marL="210000" indent="-140000">
               <a:lnSpc>
-                <a:spcPct val="105000"/>
-              </a:lnSpc>
-              <a:spcBef>
-                <a:spcPts val="0"/>
-              </a:spcBef>
-              <a:spcAft>
-                <a:spcPts val="55"/>
+                <a:spcPct val="92000"/>
+              </a:lnSpc>
+              <a:spcBef>
+                <a:spcPts val="0"/>
+              </a:spcBef>
+              <a:spcAft>
+                <a:spcPts val="15"/>
               </a:spcAft>
             </a:pPr>
             <a:r>
               <a:rPr sz="1920" b="1">
                 <a:solidFill>
-                  <a:srgbClr val="000000"/>
-                </a:solidFill>
-                <a:latin typeface="Times New Roman"/>
-                <a:ea typeface="Times New Roman"/>
-                <a:cs typeface="Times New Roman"/>
-              </a:rPr>
-              <a:t>● 动⁠态⁠障⁠碍预测使用短时常速度假设。</a:t>
-            </a:r>
-          </a:p>
-          <a:p>
-            <a:pPr algn="l" marL="350000" indent="-120000">
-              <a:lnSpc>
-                <a:spcPct val="105000"/>
-              </a:lnSpc>
-              <a:spcBef>
-                <a:spcPts val="0"/>
-              </a:spcBef>
-              <a:spcAft>
-                <a:spcPts val="55"/>
+                  <a:srgbClr val="191919"/>
+                </a:solidFill>
+                <a:latin typeface="Times New Roman"/>
+                <a:ea typeface="Times New Roman"/>
+                <a:cs typeface="Times New Roman"/>
+              </a:rPr>
+              <a:t>● 动态障碍预测使用</a:t>
+            </a:r>
+            <a:r>
+              <a:rPr sz="1920" b="1">
+                <a:solidFill>
+                  <a:srgbClr val="DC1423"/>
+                </a:solidFill>
+                <a:latin typeface="Times New Roman"/>
+                <a:ea typeface="Times New Roman"/>
+                <a:cs typeface="Times New Roman"/>
+              </a:rPr>
+              <a:t>短时常速度</a:t>
+            </a:r>
+            <a:r>
+              <a:rPr sz="1920" b="1">
+                <a:solidFill>
+                  <a:srgbClr val="191919"/>
+                </a:solidFill>
+                <a:latin typeface="Times New Roman"/>
+                <a:ea typeface="Times New Roman"/>
+                <a:cs typeface="Times New Roman"/>
+              </a:rPr>
+              <a:t>假设。</a:t>
+            </a:r>
+          </a:p>
+          <a:p>
+            <a:pPr marL="350000" indent="-120000">
+              <a:lnSpc>
+                <a:spcPct val="92000"/>
+              </a:lnSpc>
+              <a:spcAft>
+                <a:spcPts val="15"/>
               </a:spcAft>
             </a:pPr>
             <a:r>
               <a:rPr sz="1840" b="0">
                 <a:solidFill>
-                  <a:srgbClr val="000000"/>
-                </a:solidFill>
-                <a:latin typeface="Times New Roman"/>
-                <a:ea typeface="Times New Roman"/>
-                <a:cs typeface="Times New Roman"/>
-              </a:rPr>
-              <a:t>• 复杂人群交互或高速机动障碍可能需要更强运动模型。</a:t>
-            </a:r>
-          </a:p>
-          <a:p>
-            <a:pPr algn="l" marL="350000" indent="-120000">
-              <a:lnSpc>
-                <a:spcPct val="105000"/>
-              </a:lnSpc>
-              <a:spcBef>
-                <a:spcPts val="0"/>
-              </a:spcBef>
-              <a:spcAft>
-                <a:spcPts val="55"/>
+                  <a:srgbClr val="191919"/>
+                </a:solidFill>
+                <a:latin typeface="Times New Roman"/>
+                <a:ea typeface="Times New Roman"/>
+                <a:cs typeface="Times New Roman"/>
+              </a:rPr>
+              <a:t>• 复杂人群交互或高速机动障碍需要更强运动模型。</a:t>
+            </a:r>
+          </a:p>
+          <a:p>
+            <a:pPr marL="350000" indent="-120000">
+              <a:lnSpc>
+                <a:spcPct val="92000"/>
+              </a:lnSpc>
+              <a:spcAft>
+                <a:spcPts val="15"/>
               </a:spcAft>
             </a:pPr>
             <a:r>
               <a:rPr sz="1840" b="0">
                 <a:solidFill>
-                  <a:srgbClr val="000000"/>
-                </a:solidFill>
-                <a:latin typeface="Times New Roman"/>
-                <a:ea typeface="Times New Roman"/>
-                <a:cs typeface="Times New Roman"/>
-              </a:rPr>
-              <a:t>• 无地图设计依赖当前感知质量，遮挡和误检会影响动态点云分割。</a:t>
-            </a:r>
-          </a:p>
-          <a:p>
-            <a:pPr algn="l" marL="350000" indent="-120000">
-              <a:lnSpc>
-                <a:spcPct val="105000"/>
-              </a:lnSpc>
-              <a:spcBef>
-                <a:spcPts val="0"/>
-              </a:spcBef>
-              <a:spcAft>
-                <a:spcPts val="55"/>
-              </a:spcAft>
-            </a:pPr>
+                  <a:srgbClr val="191919"/>
+                </a:solidFill>
+                <a:latin typeface="Times New Roman"/>
+                <a:ea typeface="Times New Roman"/>
+                <a:cs typeface="Times New Roman"/>
+              </a:rPr>
+              <a:t>• 无地图设计依赖当前</a:t>
+            </a:r>
+            <a:r>
+              <a:rPr sz="1840" b="1">
+                <a:solidFill>
+                  <a:srgbClr val="DC1423"/>
+                </a:solidFill>
+                <a:latin typeface="Times New Roman"/>
+                <a:ea typeface="Times New Roman"/>
+                <a:cs typeface="Times New Roman"/>
+              </a:rPr>
+              <a:t>感知质量</a:t>
+            </a:r>
             <a:r>
               <a:rPr sz="1840" b="0">
                 <a:solidFill>
-                  <a:srgbClr val="000000"/>
-                </a:solidFill>
-                <a:latin typeface="Times New Roman"/>
-                <a:ea typeface="Times New Roman"/>
-                <a:cs typeface="Times New Roman"/>
-              </a:rPr>
-              <a:t>• 实验速度上限较保守，未来仍需验证高速动态场景。</a:t>
-            </a:r>
-          </a:p>
-          <a:p>
-            <a:pPr algn="l" marL="350000" indent="-120000">
-              <a:lnSpc>
-                <a:spcPct val="105000"/>
-              </a:lnSpc>
-              <a:spcBef>
-                <a:spcPts val="0"/>
-              </a:spcBef>
-              <a:spcAft>
-                <a:spcPts val="55"/>
+                  <a:srgbClr val="191919"/>
+                </a:solidFill>
+                <a:latin typeface="Times New Roman"/>
+                <a:ea typeface="Times New Roman"/>
+                <a:cs typeface="Times New Roman"/>
+              </a:rPr>
+              <a:t>，遮挡和误检会影响分割。</a:t>
+            </a:r>
+          </a:p>
+          <a:p>
+            <a:pPr marL="350000" indent="-120000">
+              <a:lnSpc>
+                <a:spcPct val="92000"/>
+              </a:lnSpc>
+              <a:spcAft>
+                <a:spcPts val="15"/>
               </a:spcAft>
             </a:pPr>
             <a:r>
               <a:rPr sz="1840" b="0">
                 <a:solidFill>
-                  <a:srgbClr val="000000"/>
+                  <a:srgbClr val="191919"/>
                 </a:solidFill>
                 <a:latin typeface="Times New Roman"/>
                 <a:ea typeface="Times New Roman"/>
@@ -9713,7 +9735,7 @@
             <a:r>
               <a:rPr sz="1840" b="1">
                 <a:solidFill>
-                  <a:srgbClr val="FF0000"/>
+                  <a:srgbClr val="DC1423"/>
                 </a:solidFill>
                 <a:latin typeface="Times New Roman"/>
                 <a:ea typeface="Times New Roman"/>
@@ -9724,17 +9746,398 @@
             <a:r>
               <a:rPr sz="1840" b="0">
                 <a:solidFill>
-                  <a:srgbClr val="000000"/>
-                </a:solidFill>
-                <a:latin typeface="Times New Roman"/>
-                <a:ea typeface="Times New Roman"/>
-                <a:cs typeface="Times New Roman"/>
-              </a:rPr>
-              <a:t> 和轨⁠迹⁠优⁠化仍需在更复杂三维狭窄空间中检验鲁棒性。</a:t>
-            </a:r>
-          </a:p>
-        </p:txBody>
-      </p:sp>
+                  <a:srgbClr val="191919"/>
+                </a:solidFill>
+                <a:latin typeface="Times New Roman"/>
+                <a:ea typeface="Times New Roman"/>
+                <a:cs typeface="Times New Roman"/>
+              </a:rPr>
+              <a:t> 和轨迹优化仍需在复杂三维狭窄空间检验。</a:t>
+            </a:r>
+          </a:p>
+        </p:txBody>
+      </p:sp>
+      <p:sp>
+        <p:nvSpPr>
+          <p:cNvPr id="11" name="SPOT_BOTTOM_NOTE"/>
+          <p:cNvSpPr txBox="1"/>
+          <p:nvPr/>
+        </p:nvSpPr>
+        <p:spPr>
+          <a:xfrm>
+            <a:off x="749808" y="3968496"/>
+            <a:ext cx="10652760" cy="566928"/>
+          </a:xfrm>
+          <a:prstGeom prst="rect">
+            <a:avLst/>
+          </a:prstGeom>
+          <a:noFill/>
+        </p:spPr>
+        <p:txBody>
+          <a:bodyPr wrap="square" lIns="18288" rIns="18288" tIns="18288" bIns="18288">
+            <a:spAutoFit/>
+          </a:bodyPr>
+          <a:lstStyle/>
+          <a:p>
+            <a:pPr marL="210000" indent="-140000">
+              <a:lnSpc>
+                <a:spcPct val="90000"/>
+              </a:lnSpc>
+              <a:spcAft>
+                <a:spcPts val="0"/>
+              </a:spcAft>
+            </a:pPr>
+            <a:r>
+              <a:rPr sz="1920" b="1">
+                <a:solidFill>
+                  <a:srgbClr val="191919"/>
+                </a:solidFill>
+                <a:latin typeface="Times New Roman"/>
+                <a:ea typeface="Times New Roman"/>
+                <a:cs typeface="Times New Roman"/>
+              </a:rPr>
+              <a:t>● 方法边界：</a:t>
+            </a:r>
+            <a:r>
+              <a:rPr sz="1920" b="1">
+                <a:solidFill>
+                  <a:srgbClr val="191919"/>
+                </a:solidFill>
+                <a:latin typeface="Times New Roman"/>
+                <a:ea typeface="Times New Roman"/>
+                <a:cs typeface="Times New Roman"/>
+              </a:rPr>
+              <a:t>SPOT</a:t>
+            </a:r>
+            <a:r>
+              <a:rPr sz="1920" b="1">
+                <a:solidFill>
+                  <a:srgbClr val="191919"/>
+                </a:solidFill>
+                <a:latin typeface="Times New Roman"/>
+                <a:ea typeface="Times New Roman"/>
+                <a:cs typeface="Times New Roman"/>
+              </a:rPr>
+              <a:t> 更适合感知更新稳定、障碍运动短时可预测的动态飞行场景。</a:t>
+            </a:r>
+          </a:p>
+          <a:p>
+            <a:pPr marL="350000" indent="-120000">
+              <a:lnSpc>
+                <a:spcPct val="90000"/>
+              </a:lnSpc>
+              <a:spcAft>
+                <a:spcPts val="0"/>
+              </a:spcAft>
+            </a:pPr>
+            <a:r>
+              <a:rPr sz="1840" b="0">
+                <a:solidFill>
+                  <a:srgbClr val="191919"/>
+                </a:solidFill>
+                <a:latin typeface="Times New Roman"/>
+                <a:ea typeface="Times New Roman"/>
+                <a:cs typeface="Times New Roman"/>
+              </a:rPr>
+              <a:t>• 高速动态障碍、复杂人群交互和三维狭窄空间仍是主要验证方向。</a:t>
+            </a:r>
+          </a:p>
+        </p:txBody>
+      </p:sp>
+      <p:graphicFrame>
+        <p:nvGraphicFramePr>
+          <p:cNvPr id="12" name="SPOT_BOUNDARY_TABLE"/>
+          <p:cNvGraphicFramePr>
+            <a:graphicFrameLocks noGrp="1"/>
+          </p:cNvGraphicFramePr>
+          <p:nvPr/>
+        </p:nvGraphicFramePr>
+        <p:xfrm>
+          <a:off x="786384" y="4791456"/>
+          <a:ext cx="10588752" cy="786384"/>
+        </p:xfrm>
+        <a:graphic>
+          <a:graphicData uri="http://schemas.openxmlformats.org/drawingml/2006/table">
+            <a:tbl>
+              <a:tblPr firstRow="1" bandRow="1">
+                <a:tableStyleId>{5C22544A-7EE6-4342-B048-85BDC9FD1C3A}</a:tableStyleId>
+              </a:tblPr>
+              <a:tblGrid>
+                <a:gridCol w="3529584"/>
+                <a:gridCol w="3529584"/>
+                <a:gridCol w="3529584"/>
+              </a:tblGrid>
+              <a:tr h="262128">
+                <a:tc>
+                  <a:txBody>
+                    <a:bodyPr/>
+                    <a:lstStyle/>
+                    <a:p>
+                      <a:pPr algn="ctr">
+                        <a:spcAft>
+                          <a:spcPts val="0"/>
+                        </a:spcAft>
+                      </a:pPr>
+                      <a:r>
+                        <a:rPr sz="1220" b="1">
+                          <a:solidFill>
+                            <a:srgbClr val="191919"/>
+                          </a:solidFill>
+                          <a:latin typeface="Times New Roman"/>
+                          <a:ea typeface="Times New Roman"/>
+                          <a:cs typeface="Times New Roman"/>
+                        </a:rPr>
+                        <a:t>适用场景</a:t>
+                      </a:r>
+                    </a:p>
+                  </a:txBody>
+                  <a:tcPr marL="18288" marR="18288" marT="9144" marB="9144" anchor="ctr">
+                    <a:solidFill>
+                      <a:srgbClr val="F3F5F8"/>
+                    </a:solidFill>
+                  </a:tcPr>
+                </a:tc>
+                <a:tc>
+                  <a:txBody>
+                    <a:bodyPr/>
+                    <a:lstStyle/>
+                    <a:p>
+                      <a:pPr algn="ctr">
+                        <a:spcAft>
+                          <a:spcPts val="0"/>
+                        </a:spcAft>
+                      </a:pPr>
+                      <a:r>
+                        <a:rPr sz="1220" b="1">
+                          <a:solidFill>
+                            <a:srgbClr val="191919"/>
+                          </a:solidFill>
+                          <a:latin typeface="Times New Roman"/>
+                          <a:ea typeface="Times New Roman"/>
+                          <a:cs typeface="Times New Roman"/>
+                        </a:rPr>
+                        <a:t>主要风险</a:t>
+                      </a:r>
+                    </a:p>
+                  </a:txBody>
+                  <a:tcPr marL="18288" marR="18288" marT="9144" marB="9144" anchor="ctr">
+                    <a:solidFill>
+                      <a:srgbClr val="F3F5F8"/>
+                    </a:solidFill>
+                  </a:tcPr>
+                </a:tc>
+                <a:tc>
+                  <a:txBody>
+                    <a:bodyPr/>
+                    <a:lstStyle/>
+                    <a:p>
+                      <a:pPr algn="ctr">
+                        <a:spcAft>
+                          <a:spcPts val="0"/>
+                        </a:spcAft>
+                      </a:pPr>
+                      <a:r>
+                        <a:rPr sz="1220" b="1">
+                          <a:solidFill>
+                            <a:srgbClr val="191919"/>
+                          </a:solidFill>
+                          <a:latin typeface="Times New Roman"/>
+                          <a:ea typeface="Times New Roman"/>
+                          <a:cs typeface="Times New Roman"/>
+                        </a:rPr>
+                        <a:t>验证方向</a:t>
+                      </a:r>
+                    </a:p>
+                  </a:txBody>
+                  <a:tcPr marL="18288" marR="18288" marT="9144" marB="9144" anchor="ctr">
+                    <a:solidFill>
+                      <a:srgbClr val="F3F5F8"/>
+                    </a:solidFill>
+                  </a:tcPr>
+                </a:tc>
+              </a:tr>
+              <a:tr h="262128">
+                <a:tc>
+                  <a:txBody>
+                    <a:bodyPr/>
+                    <a:lstStyle/>
+                    <a:p>
+                      <a:pPr algn="ctr">
+                        <a:spcAft>
+                          <a:spcPts val="0"/>
+                        </a:spcAft>
+                      </a:pPr>
+                      <a:r>
+                        <a:rPr sz="1220" b="0">
+                          <a:solidFill>
+                            <a:srgbClr val="191919"/>
+                          </a:solidFill>
+                          <a:latin typeface="Times New Roman"/>
+                          <a:ea typeface="Times New Roman"/>
+                          <a:cs typeface="Times New Roman"/>
+                        </a:rPr>
+                        <a:t>感知稳定的动态飞行</a:t>
+                      </a:r>
+                    </a:p>
+                  </a:txBody>
+                  <a:tcPr marL="18288" marR="18288" marT="9144" marB="9144" anchor="ctr">
+                    <a:solidFill>
+                      <a:srgbClr val="FFFFFF"/>
+                    </a:solidFill>
+                  </a:tcPr>
+                </a:tc>
+                <a:tc>
+                  <a:txBody>
+                    <a:bodyPr/>
+                    <a:lstStyle/>
+                    <a:p>
+                      <a:pPr algn="ctr">
+                        <a:spcAft>
+                          <a:spcPts val="0"/>
+                        </a:spcAft>
+                      </a:pPr>
+                      <a:r>
+                        <a:rPr sz="1220" b="1">
+                          <a:solidFill>
+                            <a:srgbClr val="DC1423"/>
+                          </a:solidFill>
+                          <a:latin typeface="Times New Roman"/>
+                          <a:ea typeface="Times New Roman"/>
+                          <a:cs typeface="Times New Roman"/>
+                        </a:rPr>
+                        <a:t>短时常速度假设</a:t>
+                      </a:r>
+                    </a:p>
+                  </a:txBody>
+                  <a:tcPr marL="18288" marR="18288" marT="9144" marB="9144" anchor="ctr">
+                    <a:solidFill>
+                      <a:srgbClr val="FFFFFF"/>
+                    </a:solidFill>
+                  </a:tcPr>
+                </a:tc>
+                <a:tc>
+                  <a:txBody>
+                    <a:bodyPr/>
+                    <a:lstStyle/>
+                    <a:p>
+                      <a:pPr algn="ctr">
+                        <a:spcAft>
+                          <a:spcPts val="0"/>
+                        </a:spcAft>
+                      </a:pPr>
+                      <a:r>
+                        <a:rPr sz="1220" b="1">
+                          <a:solidFill>
+                            <a:srgbClr val="DC1423"/>
+                          </a:solidFill>
+                          <a:latin typeface="Times New Roman"/>
+                          <a:ea typeface="Times New Roman"/>
+                          <a:cs typeface="Times New Roman"/>
+                        </a:rPr>
+                        <a:t>高速动态障碍</a:t>
+                      </a:r>
+                    </a:p>
+                  </a:txBody>
+                  <a:tcPr marL="18288" marR="18288" marT="9144" marB="9144" anchor="ctr">
+                    <a:solidFill>
+                      <a:srgbClr val="FFFFFF"/>
+                    </a:solidFill>
+                  </a:tcPr>
+                </a:tc>
+              </a:tr>
+              <a:tr h="262128">
+                <a:tc>
+                  <a:txBody>
+                    <a:bodyPr/>
+                    <a:lstStyle/>
+                    <a:p>
+                      <a:pPr algn="ctr">
+                        <a:spcAft>
+                          <a:spcPts val="0"/>
+                        </a:spcAft>
+                      </a:pPr>
+                      <a:r>
+                        <a:rPr sz="1220" b="0">
+                          <a:solidFill>
+                            <a:srgbClr val="191919"/>
+                          </a:solidFill>
+                          <a:latin typeface="Times New Roman"/>
+                          <a:ea typeface="Times New Roman"/>
+                          <a:cs typeface="Times New Roman"/>
+                        </a:rPr>
+                        <a:t>机载算力受限的系统</a:t>
+                      </a:r>
+                    </a:p>
+                  </a:txBody>
+                  <a:tcPr marL="18288" marR="18288" marT="9144" marB="9144" anchor="ctr">
+                    <a:solidFill>
+                      <a:srgbClr val="FFFFFF"/>
+                    </a:solidFill>
+                  </a:tcPr>
+                </a:tc>
+                <a:tc>
+                  <a:txBody>
+                    <a:bodyPr/>
+                    <a:lstStyle/>
+                    <a:p>
+                      <a:pPr algn="ctr">
+                        <a:spcAft>
+                          <a:spcPts val="0"/>
+                        </a:spcAft>
+                      </a:pPr>
+                      <a:r>
+                        <a:rPr sz="1220" b="0">
+                          <a:solidFill>
+                            <a:srgbClr val="191919"/>
+                          </a:solidFill>
+                          <a:latin typeface="Times New Roman"/>
+                          <a:ea typeface="Times New Roman"/>
+                          <a:cs typeface="Times New Roman"/>
+                        </a:rPr>
+                        <a:t>遮挡与误检</a:t>
+                      </a:r>
+                    </a:p>
+                  </a:txBody>
+                  <a:tcPr marL="18288" marR="18288" marT="9144" marB="9144" anchor="ctr">
+                    <a:solidFill>
+                      <a:srgbClr val="FFFFFF"/>
+                    </a:solidFill>
+                  </a:tcPr>
+                </a:tc>
+                <a:tc>
+                  <a:txBody>
+                    <a:bodyPr/>
+                    <a:lstStyle/>
+                    <a:p>
+                      <a:pPr algn="ctr">
+                        <a:spcAft>
+                          <a:spcPts val="0"/>
+                        </a:spcAft>
+                      </a:pPr>
+                      <a:r>
+                        <a:rPr sz="1220" b="0">
+                          <a:solidFill>
+                            <a:srgbClr val="191919"/>
+                          </a:solidFill>
+                          <a:latin typeface="Times New Roman"/>
+                          <a:ea typeface="Times New Roman"/>
+                          <a:cs typeface="Times New Roman"/>
+                        </a:rPr>
+                        <a:t>三维狭窄空间</a:t>
+                      </a:r>
+                    </a:p>
+                  </a:txBody>
+                  <a:tcPr marL="18288" marR="18288" marT="9144" marB="9144" anchor="ctr">
+                    <a:solidFill>
+                      <a:srgbClr val="FFFFFF"/>
+                    </a:solidFill>
+                  </a:tcPr>
+                </a:tc>
+              </a:tr>
+            </a:tbl>
+          </a:graphicData>
+        </a:graphic>
+      </p:graphicFrame>
     </p:spTree>
   </p:cSld>
   <p:clrMapOvr>

--- a/skills/uav-paper-report/assets/examples/uav-spot-regression-report.pptx
+++ b/skills/uav-paper-report/assets/examples/uav-spot-regression-report.pptx
@@ -4781,7 +4781,7 @@
                 <a:ea typeface="Times New Roman"/>
                 <a:cs typeface="Times New Roman"/>
               </a:rPr>
-              <a:t>(7a)    </a:t>
+              <a:t>(7a)    min(ξ)   Jₛ(q,T) + Jd(q,T)</a:t>
             </a:r>
             <a:r>
               <a:rPr sz="2300" b="0">
@@ -4792,7 +4792,7 @@
                 <a:ea typeface="Times New Roman"/>
                 <a:cs typeface="Times New Roman"/>
               </a:rPr>
-              <a:t>min_ξ   Jₛ(q,T) + J_d(q,T)</a:t>
+              <a:t/>
             </a:r>
           </a:p>
         </p:txBody>
@@ -4897,7 +4897,7 @@
                 <a:ea typeface="Times New Roman"/>
                 <a:cs typeface="Times New Roman"/>
               </a:rPr>
-              <a:t>(7c)    </a:t>
+              <a:t>(7c)    s⁽⁰:²⁾(0)=s₀⁽⁰:²⁾,     s⁽⁰:²⁾(T)=s(f)⁽⁰:²⁾</a:t>
             </a:r>
             <a:r>
               <a:rPr sz="2060" b="0">
@@ -4908,7 +4908,7 @@
                 <a:ea typeface="Times New Roman"/>
                 <a:cs typeface="Times New Roman"/>
               </a:rPr>
-              <a:t>s⁽⁰:²⁾(0)=s₀⁽⁰:²⁾,     s⁽⁰:²⁾(T)=s_f⁽⁰:²⁾</a:t>
+              <a:t/>
             </a:r>
           </a:p>
         </p:txBody>
@@ -5015,7 +5015,7 @@
                 <a:ea typeface="Times New Roman"/>
                 <a:cs typeface="Times New Roman"/>
               </a:rPr>
-              <a:t>• J_d汇总最大速度、加速度和走廊违反惩罚，保证轨迹不穿出时空安全区域。</a:t>
+              <a:t>• Jd汇总最大速度、加速度和走廊违反惩罚，保证轨迹不穿出时空安全区域。</a:t>
             </a:r>
           </a:p>
           <a:p>
@@ -5286,7 +5286,7 @@
                 <a:ea typeface="Times New Roman"/>
                 <a:cs typeface="Times New Roman"/>
               </a:rPr>
-              <a:t>• 首先围绕UAV当前位置构造仅考虑静态障碍的凸区域C_static。</a:t>
+              <a:t>• 首先围绕UAV当前位置构造仅考虑静态障碍的凸区域Cₛ。</a:t>
             </a:r>
           </a:p>
           <a:p>
@@ -5356,7 +5356,7 @@
                 <a:ea typeface="Times New Roman"/>
                 <a:cs typeface="Times New Roman"/>
               </a:rPr>
-              <a:t>• 逃逸方向与C_static的交点作为backup goal，再由 </a:t>
+              <a:t>• 逃逸方向与Cₛ的交点作为backup goal，再由 ST‑RRT* + SFC +轨⁠迹⁠优⁠化生成备⁠份⁠轨⁠迹。</a:t>
             </a:r>
             <a:r>
               <a:rPr sz="1840" b="1">
@@ -5367,7 +5367,7 @@
                 <a:ea typeface="Times New Roman"/>
                 <a:cs typeface="Times New Roman"/>
               </a:rPr>
-              <a:t>ST‑RRT*</a:t>
+              <a:t/>
             </a:r>
             <a:r>
               <a:rPr sz="1840" b="0">
@@ -5378,7 +5378,7 @@
                 <a:ea typeface="Times New Roman"/>
                 <a:cs typeface="Times New Roman"/>
               </a:rPr>
-              <a:t> + </a:t>
+              <a:t/>
             </a:r>
             <a:r>
               <a:rPr sz="1840" b="1">
@@ -5389,7 +5389,7 @@
                 <a:ea typeface="Times New Roman"/>
                 <a:cs typeface="Times New Roman"/>
               </a:rPr>
-              <a:t>SFC</a:t>
+              <a:t/>
             </a:r>
             <a:r>
               <a:rPr sz="1840" b="0">
@@ -5400,7 +5400,7 @@
                 <a:ea typeface="Times New Roman"/>
                 <a:cs typeface="Times New Roman"/>
               </a:rPr>
-              <a:t> +轨⁠迹⁠优⁠化生成备⁠份⁠轨⁠迹。</a:t>
+              <a:t/>
             </a:r>
           </a:p>
           <a:p>
@@ -16127,7 +16127,7 @@
                 <a:ea typeface="Times New Roman"/>
                 <a:cs typeface="Times New Roman"/>
               </a:rPr>
-              <a:t>(3)    </a:t>
+              <a:t>(3)    ||pₛ - p|| + ||p - p(g)|| &lt;= cᵦ</a:t>
             </a:r>
             <a:r>
               <a:rPr sz="2300" b="0">
@@ -16138,7 +16138,7 @@
                 <a:ea typeface="Times New Roman"/>
                 <a:cs typeface="Times New Roman"/>
               </a:rPr>
-              <a:t>||pₛ - p|| + ||p - p_g|| &lt;= c_best</a:t>
+              <a:t/>
             </a:r>
           </a:p>
         </p:txBody>
@@ -16185,7 +16185,7 @@
                 <a:ea typeface="Times New Roman"/>
                 <a:cs typeface="Times New Roman"/>
               </a:rPr>
-              <a:t>(4)    </a:t>
+              <a:t>(4)    tᵣ = tₛ + k·cᵦ / w,     k ~ U(0,1)</a:t>
             </a:r>
             <a:r>
               <a:rPr sz="2200" b="0">
@@ -16196,7 +16196,7 @@
                 <a:ea typeface="Times New Roman"/>
                 <a:cs typeface="Times New Roman"/>
               </a:rPr>
-              <a:t>t_rand = tₛ + k·c_best / w,     k ~ U(0,1)</a:t>
+              <a:t/>
             </a:r>
           </a:p>
         </p:txBody>
@@ -16243,7 +16243,7 @@
                 <a:ea typeface="Times New Roman"/>
                 <a:cs typeface="Times New Roman"/>
               </a:rPr>
-              <a:t>    </a:t>
+              <a:t>    G[tᵦ, cell(p(t))] &lt;- Oᵈ(t)</a:t>
             </a:r>
             <a:r>
               <a:rPr sz="2140" b="0">
@@ -16254,7 +16254,7 @@
                 <a:ea typeface="Times New Roman"/>
                 <a:cs typeface="Times New Roman"/>
               </a:rPr>
-              <a:t>G[t_bin, cell(p(t))] &lt;- Oᵈ(t)</a:t>
+              <a:t/>
             </a:r>
           </a:p>
         </p:txBody>
@@ -16337,7 +16337,7 @@
                 <a:ea typeface="Times New Roman"/>
                 <a:cs typeface="Times New Roman"/>
               </a:rPr>
-              <a:t>• c_best定义当前最优路径诱导的informed set，减少无效空间采样。</a:t>
+              <a:t>• cᵦ定义当前最优路径诱导的informed set，减少无效空间采样。</a:t>
             </a:r>
           </a:p>
           <a:p>

--- a/skills/uav-paper-report/assets/examples/uav-spot-regression-report.pptx
+++ b/skills/uav-paper-report/assets/examples/uav-spot-regression-report.pptx
@@ -4194,24 +4194,22 @@
           <a:noFill/>
         </p:spPr>
         <p:txBody>
-          <a:bodyPr wrap="square" lIns="0" rIns="0" tIns="0" bIns="0">
-            <a:spAutoFit/>
-          </a:bodyPr>
+          <a:bodyPr wrap="square" lIns="36576" rIns="36576" tIns="18288" bIns="18288" anchor="t"/>
           <a:lstStyle/>
           <a:p>
             <a:pPr algn="l" marL="210000" indent="-140000">
               <a:lnSpc>
-                <a:spcPct val="105000"/>
-              </a:lnSpc>
-              <a:spcBef>
-                <a:spcPts val="0"/>
-              </a:spcBef>
-              <a:spcAft>
-                <a:spcPts val="0"/>
-              </a:spcAft>
-            </a:pPr>
-            <a:r>
-              <a:rPr sz="1920" b="1">
+                <a:spcPct val="102000"/>
+              </a:lnSpc>
+              <a:spcBef>
+                <a:spcPts val="0"/>
+              </a:spcBef>
+              <a:spcAft>
+                <a:spcPts val="200"/>
+              </a:spcAft>
+            </a:pPr>
+            <a:r>
+              <a:rPr sz="1920" b="1" lang="zh-CN">
                 <a:solidFill>
                   <a:srgbClr val="000000"/>
                 </a:solidFill>
@@ -4222,9 +4220,9 @@
               <a:t>● </a:t>
             </a:r>
             <a:r>
-              <a:rPr sz="1920" b="1">
-                <a:solidFill>
-                  <a:srgbClr val="FF0000"/>
+              <a:rPr sz="1920" b="1" lang="zh-CN">
+                <a:solidFill>
+                  <a:srgbClr val="DC0000"/>
                 </a:solidFill>
                 <a:latin typeface="Times New Roman"/>
                 <a:ea typeface="Times New Roman"/>
@@ -4233,20 +4231,20 @@
               <a:t>SPOT</a:t>
             </a:r>
             <a:r>
-              <a:rPr sz="1920" b="1">
-                <a:solidFill>
-                  <a:srgbClr val="000000"/>
-                </a:solidFill>
-                <a:latin typeface="Times New Roman"/>
-                <a:ea typeface="Times New Roman"/>
-                <a:cs typeface="Times New Roman"/>
-              </a:rPr>
-              <a:t> 沿 </a:t>
-            </a:r>
-            <a:r>
-              <a:rPr sz="1920" b="1">
-                <a:solidFill>
-                  <a:srgbClr val="FF0000"/>
+              <a:rPr sz="1920" b="1" lang="zh-CN">
+                <a:solidFill>
+                  <a:srgbClr val="000000"/>
+                </a:solidFill>
+                <a:latin typeface="Times New Roman"/>
+                <a:ea typeface="Times New Roman"/>
+                <a:cs typeface="Times New Roman"/>
+              </a:rPr>
+              <a:t>沿</a:t>
+            </a:r>
+            <a:r>
+              <a:rPr sz="1920" b="1" lang="zh-CN">
+                <a:solidFill>
+                  <a:srgbClr val="DC0000"/>
                 </a:solidFill>
                 <a:latin typeface="Times New Roman"/>
                 <a:ea typeface="Times New Roman"/>
@@ -4255,39 +4253,39 @@
               <a:t>ST‑RRT*</a:t>
             </a:r>
             <a:r>
-              <a:rPr sz="1920" b="1">
-                <a:solidFill>
-                  <a:srgbClr val="000000"/>
-                </a:solidFill>
-                <a:latin typeface="Times New Roman"/>
-                <a:ea typeface="Times New Roman"/>
-                <a:cs typeface="Times New Roman"/>
-              </a:rPr>
-              <a:t> 生成的路径段构造凸多面体，并把动⁠态⁠障⁠碍未来位置纳入走廊生成。</a:t>
-            </a:r>
-          </a:p>
-          <a:p>
-            <a:pPr algn="l" marL="350000" indent="-120000">
-              <a:lnSpc>
-                <a:spcPct val="105000"/>
-              </a:lnSpc>
-              <a:spcBef>
-                <a:spcPts val="0"/>
-              </a:spcBef>
-              <a:spcAft>
-                <a:spcPts val="0"/>
-              </a:spcAft>
-            </a:pPr>
-            <a:r>
-              <a:rPr sz="1840" b="0">
-                <a:solidFill>
-                  <a:srgbClr val="000000"/>
-                </a:solidFill>
-                <a:latin typeface="Times New Roman"/>
-                <a:ea typeface="Times New Roman"/>
-                <a:cs typeface="Times New Roman"/>
-              </a:rPr>
-              <a:t>• 红到灰的颜色表示时间演化，绿色线为最终优化轨迹。</a:t>
+              <a:rPr sz="1920" b="1" lang="zh-CN">
+                <a:solidFill>
+                  <a:srgbClr val="000000"/>
+                </a:solidFill>
+                <a:latin typeface="Times New Roman"/>
+                <a:ea typeface="Times New Roman"/>
+                <a:cs typeface="Times New Roman"/>
+              </a:rPr>
+              <a:t>路径段构造时空安全走廊。</a:t>
+            </a:r>
+          </a:p>
+          <a:p>
+            <a:pPr>
+              <a:lnSpc>
+                <a:spcPct val="102000"/>
+              </a:lnSpc>
+              <a:spcBef>
+                <a:spcPts val="0"/>
+              </a:spcBef>
+              <a:spcAft>
+                <a:spcPts val="200"/>
+              </a:spcAft>
+            </a:pPr>
+            <a:r>
+              <a:rPr sz="1839" b="0" lang="zh-CN">
+                <a:solidFill>
+                  <a:srgbClr val="000000"/>
+                </a:solidFill>
+                <a:latin typeface="Times New Roman"/>
+                <a:ea typeface="Times New Roman"/>
+                <a:cs typeface="Times New Roman"/>
+              </a:rPr>
+              <a:t>• 红到灰表示时间演化，绿色线为最终优化轨迹。</a:t>
             </a:r>
           </a:p>
         </p:txBody>
@@ -4308,8 +4306,8 @@
         </p:blipFill>
         <p:spPr>
           <a:xfrm>
-            <a:off x="4843701" y="2487168"/>
-            <a:ext cx="2492405" cy="2615184"/>
+            <a:off x="932688" y="2487168"/>
+            <a:ext cx="3566160" cy="3749039"/>
           </a:xfrm>
           <a:prstGeom prst="rect">
             <a:avLst/>
@@ -4324,8 +4322,8 @@
         </p:nvSpPr>
         <p:spPr>
           <a:xfrm>
-            <a:off x="694944" y="5285232"/>
-            <a:ext cx="10789920" cy="16459"/>
+            <a:off x="4901184" y="2505456"/>
+            <a:ext cx="18288" cy="3529584"/>
           </a:xfrm>
           <a:prstGeom prst="rect">
             <a:avLst/>
@@ -4360,8 +4358,8 @@
         </p:nvSpPr>
         <p:spPr>
           <a:xfrm>
-            <a:off x="676656" y="5468112"/>
-            <a:ext cx="10899648" cy="822960"/>
+            <a:off x="5212080" y="2542032"/>
+            <a:ext cx="5998464" cy="2340864"/>
           </a:xfrm>
           <a:prstGeom prst="rect">
             <a:avLst/>
@@ -4369,56 +4367,102 @@
           <a:noFill/>
         </p:spPr>
         <p:txBody>
-          <a:bodyPr wrap="square" lIns="0" rIns="0" tIns="0" bIns="0">
-            <a:spAutoFit/>
-          </a:bodyPr>
+          <a:bodyPr wrap="square" lIns="36576" rIns="36576" tIns="18288" bIns="18288" anchor="t"/>
           <a:lstStyle/>
           <a:p>
             <a:pPr algn="l" marL="350000" indent="-120000">
               <a:lnSpc>
-                <a:spcPct val="100000"/>
-              </a:lnSpc>
-              <a:spcBef>
-                <a:spcPts val="0"/>
-              </a:spcBef>
-              <a:spcAft>
-                <a:spcPts val="0"/>
-              </a:spcAft>
-            </a:pPr>
-            <a:r>
-              <a:rPr sz="1840" b="0">
-                <a:solidFill>
-                  <a:srgbClr val="000000"/>
-                </a:solidFill>
-                <a:latin typeface="Times New Roman"/>
-                <a:ea typeface="Times New Roman"/>
-                <a:cs typeface="Times New Roman"/>
-              </a:rPr>
-              <a:t>• 动⁠态⁠障⁠碍不是只在当前帧避开，而是在路径段对应的时间窗口内参与走廊构造。</a:t>
-            </a:r>
-          </a:p>
-          <a:p>
-            <a:pPr algn="l" marL="350000" indent="-120000">
-              <a:lnSpc>
-                <a:spcPct val="100000"/>
-              </a:lnSpc>
-              <a:spcBef>
-                <a:spcPts val="0"/>
-              </a:spcBef>
-              <a:spcAft>
-                <a:spcPts val="0"/>
-              </a:spcAft>
-            </a:pPr>
-            <a:r>
-              <a:rPr sz="1840" b="0">
-                <a:solidFill>
-                  <a:srgbClr val="000000"/>
-                </a:solidFill>
-                <a:latin typeface="Times New Roman"/>
-                <a:ea typeface="Times New Roman"/>
-                <a:cs typeface="Times New Roman"/>
-              </a:rPr>
-              <a:t>• 该设计把“空间上可通行”进一步收紧为“到达时间上也安全”。</a:t>
+                <a:spcPct val="102000"/>
+              </a:lnSpc>
+              <a:spcBef>
+                <a:spcPts val="0"/>
+              </a:spcBef>
+              <a:spcAft>
+                <a:spcPts val="200"/>
+              </a:spcAft>
+            </a:pPr>
+            <a:r>
+              <a:rPr sz="1839" b="0" lang="zh-CN">
+                <a:solidFill>
+                  <a:srgbClr val="000000"/>
+                </a:solidFill>
+                <a:latin typeface="Times New Roman"/>
+                <a:ea typeface="Times New Roman"/>
+                <a:cs typeface="Times New Roman"/>
+              </a:rPr>
+              <a:t>• 动态障碍不是只在当前帧避开，而是在路径段对应的时间窗口内参与走廊构造。</a:t>
+            </a:r>
+          </a:p>
+          <a:p>
+            <a:pPr>
+              <a:lnSpc>
+                <a:spcPct val="102000"/>
+              </a:lnSpc>
+              <a:spcBef>
+                <a:spcPts val="0"/>
+              </a:spcBef>
+              <a:spcAft>
+                <a:spcPts val="200"/>
+              </a:spcAft>
+            </a:pPr>
+            <a:r>
+              <a:rPr sz="1839" b="0" lang="zh-CN">
+                <a:solidFill>
+                  <a:srgbClr val="000000"/>
+                </a:solidFill>
+                <a:latin typeface="Times New Roman"/>
+                <a:ea typeface="Times New Roman"/>
+                <a:cs typeface="Times New Roman"/>
+              </a:rPr>
+              <a:t>• 每一段凸多面体同时对应空间位置和到达时间，避免只满足几何可通行。</a:t>
+            </a:r>
+          </a:p>
+          <a:p>
+            <a:pPr>
+              <a:lnSpc>
+                <a:spcPct val="102000"/>
+              </a:lnSpc>
+              <a:spcBef>
+                <a:spcPts val="0"/>
+              </a:spcBef>
+              <a:spcAft>
+                <a:spcPts val="200"/>
+              </a:spcAft>
+            </a:pPr>
+            <a:r>
+              <a:rPr sz="1839" b="0" lang="zh-CN">
+                <a:solidFill>
+                  <a:srgbClr val="000000"/>
+                </a:solidFill>
+                <a:latin typeface="Times New Roman"/>
+                <a:ea typeface="Times New Roman"/>
+                <a:cs typeface="Times New Roman"/>
+              </a:rPr>
+              <a:t>• 绿色轨迹穿过走廊中心，说明优化结果仍保持连续可执行。</a:t>
+            </a:r>
+          </a:p>
+          <a:p>
+            <a:pPr>
+              <a:lnSpc>
+                <a:spcPct val="102000"/>
+              </a:lnSpc>
+              <a:spcBef>
+                <a:spcPts val="0"/>
+              </a:spcBef>
+              <a:spcAft>
+                <a:spcPts val="200"/>
+              </a:spcAft>
+            </a:pPr>
+            <a:r>
+              <a:rPr sz="1839" b="0" lang="zh-CN">
+                <a:solidFill>
+                  <a:srgbClr val="000000"/>
+                </a:solidFill>
+                <a:latin typeface="Times New Roman"/>
+                <a:ea typeface="Times New Roman"/>
+                <a:cs typeface="Times New Roman"/>
+              </a:rPr>
+              <a:t>• 该设计把空间安全进一步收紧为时空一致的飞行约束。</a:t>
             </a:r>
           </a:p>
         </p:txBody>
@@ -7508,376 +7552,25 @@
       </p:pic>
       <p:sp>
         <p:nvSpPr>
-          <p:cNvPr id="4" name="TextBox 3"/>
-          <p:cNvSpPr txBox="1"/>
-          <p:nvPr/>
-        </p:nvSpPr>
-        <p:spPr>
-          <a:xfrm>
-            <a:off x="2971800" y="100584"/>
-            <a:ext cx="7040880" cy="566928"/>
-          </a:xfrm>
-          <a:prstGeom prst="rect">
-            <a:avLst/>
-          </a:prstGeom>
-          <a:noFill/>
-        </p:spPr>
-        <p:txBody>
-          <a:bodyPr wrap="square">
-            <a:spAutoFit/>
-          </a:bodyPr>
-          <a:lstStyle/>
-          <a:p>
-            <a:pPr algn="l"/>
-            <a:r>
-              <a:rPr sz="2800" b="1">
-                <a:solidFill>
-                  <a:srgbClr val="000000"/>
-                </a:solidFill>
-                <a:latin typeface="Times New Roman"/>
-                <a:ea typeface="Times New Roman"/>
-                <a:cs typeface="Times New Roman"/>
-              </a:rPr>
-              <a:t>Part. 03  实验结果分析</a:t>
-            </a:r>
-          </a:p>
-        </p:txBody>
-      </p:sp>
-      <p:sp>
-        <p:nvSpPr>
-          <p:cNvPr id="5" name="TextBox 4"/>
-          <p:cNvSpPr txBox="1"/>
-          <p:nvPr/>
-        </p:nvSpPr>
-        <p:spPr>
-          <a:xfrm>
-            <a:off x="640080" y="1024128"/>
-            <a:ext cx="7772400" cy="493776"/>
-          </a:xfrm>
-          <a:prstGeom prst="rect">
-            <a:avLst/>
-          </a:prstGeom>
-          <a:noFill/>
-        </p:spPr>
-        <p:txBody>
-          <a:bodyPr wrap="square">
-            <a:spAutoFit/>
-          </a:bodyPr>
-          <a:lstStyle/>
-          <a:p>
-            <a:pPr algn="l"/>
-            <a:r>
-              <a:rPr sz="2000" b="1">
-                <a:solidFill>
-                  <a:srgbClr val="000000"/>
-                </a:solidFill>
-                <a:latin typeface="Times New Roman"/>
-                <a:ea typeface="Times New Roman"/>
-                <a:cs typeface="Times New Roman"/>
-              </a:rPr>
-              <a:t>3.2 Backup 消融分析</a:t>
-            </a:r>
-          </a:p>
-        </p:txBody>
-      </p:sp>
-      <p:sp>
-        <p:nvSpPr>
-          <p:cNvPr id="6" name="TextBox 5"/>
-          <p:cNvSpPr txBox="1"/>
-          <p:nvPr/>
-        </p:nvSpPr>
-        <p:spPr>
-          <a:xfrm>
-            <a:off x="566928" y="1609344"/>
-            <a:ext cx="10972800" cy="2706624"/>
-          </a:xfrm>
-          <a:prstGeom prst="rect">
-            <a:avLst/>
-          </a:prstGeom>
-          <a:noFill/>
-        </p:spPr>
-        <p:txBody>
-          <a:bodyPr wrap="square" lIns="0" rIns="0" tIns="0" bIns="0">
-            <a:spAutoFit/>
-          </a:bodyPr>
-          <a:lstStyle/>
-          <a:p>
-            <a:pPr algn="l" marL="210000" indent="-140000">
-              <a:lnSpc>
-                <a:spcPct val="98000"/>
-              </a:lnSpc>
-              <a:spcBef>
-                <a:spcPts val="0"/>
-              </a:spcBef>
-              <a:spcAft>
-                <a:spcPts val="18"/>
-              </a:spcAft>
-            </a:pPr>
-            <a:r>
-              <a:rPr sz="1920" b="1">
-                <a:solidFill>
-                  <a:srgbClr val="000000"/>
-                </a:solidFill>
-                <a:latin typeface="Times New Roman"/>
-                <a:ea typeface="Times New Roman"/>
-                <a:cs typeface="Times New Roman"/>
-              </a:rPr>
-              <a:t>● backup机制对高动⁠态⁠障⁠碍密度场景贡献最明显。</a:t>
-            </a:r>
-          </a:p>
-          <a:p>
-            <a:pPr algn="l" marL="350000" indent="-120000">
-              <a:lnSpc>
-                <a:spcPct val="98000"/>
-              </a:lnSpc>
-              <a:spcBef>
-                <a:spcPts val="0"/>
-              </a:spcBef>
-              <a:spcAft>
-                <a:spcPts val="18"/>
-              </a:spcAft>
-            </a:pPr>
-            <a:r>
-              <a:rPr sz="1840" b="0">
-                <a:solidFill>
-                  <a:srgbClr val="000000"/>
-                </a:solidFill>
-                <a:latin typeface="Times New Roman"/>
-                <a:ea typeface="Times New Roman"/>
-                <a:cs typeface="Times New Roman"/>
-              </a:rPr>
-              <a:t>• 10个障碍时，</a:t>
-            </a:r>
-            <a:r>
-              <a:rPr sz="1840" b="1">
-                <a:solidFill>
-                  <a:srgbClr val="FF0000"/>
-                </a:solidFill>
-                <a:latin typeface="Times New Roman"/>
-                <a:ea typeface="Times New Roman"/>
-                <a:cs typeface="Times New Roman"/>
-              </a:rPr>
-              <a:t>SPOT</a:t>
-            </a:r>
-            <a:r>
-              <a:rPr sz="1840" b="0">
-                <a:solidFill>
-                  <a:srgbClr val="000000"/>
-                </a:solidFill>
-                <a:latin typeface="Times New Roman"/>
-                <a:ea typeface="Times New Roman"/>
-                <a:cs typeface="Times New Roman"/>
-              </a:rPr>
-              <a:t> 和无backup版本成⁠功⁠率都较高，差距只有5.8个百分点。</a:t>
-            </a:r>
-          </a:p>
-          <a:p>
-            <a:pPr algn="l" marL="350000" indent="-120000">
-              <a:lnSpc>
-                <a:spcPct val="98000"/>
-              </a:lnSpc>
-              <a:spcBef>
-                <a:spcPts val="0"/>
-              </a:spcBef>
-              <a:spcAft>
-                <a:spcPts val="18"/>
-              </a:spcAft>
-            </a:pPr>
-            <a:r>
-              <a:rPr sz="1840" b="0">
-                <a:solidFill>
-                  <a:srgbClr val="000000"/>
-                </a:solidFill>
-                <a:latin typeface="Times New Roman"/>
-                <a:ea typeface="Times New Roman"/>
-                <a:cs typeface="Times New Roman"/>
-              </a:rPr>
-              <a:t>• 30个障碍时，无backup版本成⁠功⁠率下降到 </a:t>
-            </a:r>
-            <a:r>
-              <a:rPr sz="1840" b="1">
-                <a:solidFill>
-                  <a:srgbClr val="FF0000"/>
-                </a:solidFill>
-                <a:latin typeface="Times New Roman"/>
-                <a:ea typeface="Times New Roman"/>
-                <a:cs typeface="Times New Roman"/>
-              </a:rPr>
-              <a:t>52.2%</a:t>
-            </a:r>
-            <a:r>
-              <a:rPr sz="1840" b="0">
-                <a:solidFill>
-                  <a:srgbClr val="000000"/>
-                </a:solidFill>
-                <a:latin typeface="Times New Roman"/>
-                <a:ea typeface="Times New Roman"/>
-                <a:cs typeface="Times New Roman"/>
-              </a:rPr>
-              <a:t>，</a:t>
-            </a:r>
-            <a:r>
-              <a:rPr sz="1840" b="1">
-                <a:solidFill>
-                  <a:srgbClr val="FF0000"/>
-                </a:solidFill>
-                <a:latin typeface="Times New Roman"/>
-                <a:ea typeface="Times New Roman"/>
-                <a:cs typeface="Times New Roman"/>
-              </a:rPr>
-              <a:t>SPOT</a:t>
-            </a:r>
-            <a:r>
-              <a:rPr sz="1840" b="0">
-                <a:solidFill>
-                  <a:srgbClr val="000000"/>
-                </a:solidFill>
-                <a:latin typeface="Times New Roman"/>
-                <a:ea typeface="Times New Roman"/>
-                <a:cs typeface="Times New Roman"/>
-              </a:rPr>
-              <a:t> 仍达到 </a:t>
-            </a:r>
-            <a:r>
-              <a:rPr sz="1840" b="1">
-                <a:solidFill>
-                  <a:srgbClr val="FF0000"/>
-                </a:solidFill>
-                <a:latin typeface="Times New Roman"/>
-                <a:ea typeface="Times New Roman"/>
-                <a:cs typeface="Times New Roman"/>
-              </a:rPr>
-              <a:t>80.2%</a:t>
-            </a:r>
-            <a:r>
-              <a:rPr sz="1840" b="0">
-                <a:solidFill>
-                  <a:srgbClr val="000000"/>
-                </a:solidFill>
-                <a:latin typeface="Times New Roman"/>
-                <a:ea typeface="Times New Roman"/>
-                <a:cs typeface="Times New Roman"/>
-              </a:rPr>
-              <a:t>。</a:t>
-            </a:r>
-          </a:p>
-          <a:p>
-            <a:pPr algn="l" marL="350000" indent="-120000">
-              <a:lnSpc>
-                <a:spcPct val="98000"/>
-              </a:lnSpc>
-              <a:spcBef>
-                <a:spcPts val="0"/>
-              </a:spcBef>
-              <a:spcAft>
-                <a:spcPts val="18"/>
-              </a:spcAft>
-            </a:pPr>
-            <a:r>
-              <a:rPr sz="1840" b="0">
-                <a:solidFill>
-                  <a:srgbClr val="000000"/>
-                </a:solidFill>
-                <a:latin typeface="Times New Roman"/>
-                <a:ea typeface="Times New Roman"/>
-                <a:cs typeface="Times New Roman"/>
-              </a:rPr>
-              <a:t>• 论文解释为：无backup时UAV可能在目标路径不可达时悬停，从而更容易与动⁠态⁠障⁠碍碰撞。</a:t>
-            </a:r>
-          </a:p>
-          <a:p>
-            <a:pPr algn="l" marL="210000" indent="-140000">
-              <a:lnSpc>
-                <a:spcPct val="98000"/>
-              </a:lnSpc>
-              <a:spcBef>
-                <a:spcPts val="0"/>
-              </a:spcBef>
-              <a:spcAft>
-                <a:spcPts val="18"/>
-              </a:spcAft>
-            </a:pPr>
-            <a:r>
-              <a:rPr sz="1920" b="1">
-                <a:solidFill>
-                  <a:srgbClr val="000000"/>
-                </a:solidFill>
-                <a:latin typeface="Times New Roman"/>
-                <a:ea typeface="Times New Roman"/>
-                <a:cs typeface="Times New Roman"/>
-              </a:rPr>
-              <a:t>● 消融表II</a:t>
-            </a:r>
-          </a:p>
-          <a:p>
-            <a:pPr algn="l" marL="350000" indent="-120000">
-              <a:lnSpc>
-                <a:spcPct val="98000"/>
-              </a:lnSpc>
-              <a:spcBef>
-                <a:spcPts val="0"/>
-              </a:spcBef>
-              <a:spcAft>
-                <a:spcPts val="18"/>
-              </a:spcAft>
-            </a:pPr>
-            <a:r>
-              <a:rPr sz="1840" b="0">
-                <a:solidFill>
-                  <a:srgbClr val="000000"/>
-                </a:solidFill>
-                <a:latin typeface="Times New Roman"/>
-                <a:ea typeface="Times New Roman"/>
-                <a:cs typeface="Times New Roman"/>
-              </a:rPr>
-              <a:t>• 10 obstacles：length 16.77 m，replans 3，backup 0，time 19.13 s。</a:t>
-            </a:r>
-          </a:p>
-          <a:p>
-            <a:pPr algn="l" marL="350000" indent="-120000">
-              <a:lnSpc>
-                <a:spcPct val="98000"/>
-              </a:lnSpc>
-              <a:spcBef>
-                <a:spcPts val="0"/>
-              </a:spcBef>
-              <a:spcAft>
-                <a:spcPts val="18"/>
-              </a:spcAft>
-            </a:pPr>
-            <a:r>
-              <a:rPr sz="1840" b="0">
-                <a:solidFill>
-                  <a:srgbClr val="000000"/>
-                </a:solidFill>
-                <a:latin typeface="Times New Roman"/>
-                <a:ea typeface="Times New Roman"/>
-                <a:cs typeface="Times New Roman"/>
-              </a:rPr>
-              <a:t>• 30 obstacles：length 26.44 m，replans 23，backup 5，time 50.9 s。</a:t>
-            </a:r>
-          </a:p>
-        </p:txBody>
-      </p:sp>
-      <p:sp>
-        <p:nvSpPr>
-          <p:cNvPr id="7" name="Rectangle 6"/>
+          <p:cNvPr id="19" name="DENSITY_METRIC_PANEL_3"/>
           <p:cNvSpPr/>
           <p:nvPr/>
         </p:nvSpPr>
         <p:spPr>
           <a:xfrm>
-            <a:off x="713232" y="4233672"/>
-            <a:ext cx="10771632" cy="16459"/>
+            <a:off x="7754112" y="3621024"/>
+            <a:ext cx="3511296" cy="987552"/>
           </a:xfrm>
           <a:prstGeom prst="rect">
             <a:avLst/>
           </a:prstGeom>
           <a:solidFill>
-            <a:srgbClr val="BEBEBE"/>
+            <a:srgbClr val="F2F4F7"/>
           </a:solidFill>
-          <a:ln>
-            <a:noFill/>
+          <a:ln w="8890">
+            <a:solidFill>
+              <a:srgbClr val="D6DAE0"/>
+            </a:solidFill>
           </a:ln>
         </p:spPr>
         <p:style>
@@ -7897,14 +7590,539 @@
       </p:sp>
       <p:sp>
         <p:nvSpPr>
+          <p:cNvPr id="18" name="DENSITY_METRIC_PANEL_2"/>
+          <p:cNvSpPr/>
+          <p:nvPr/>
+        </p:nvSpPr>
+        <p:spPr>
+          <a:xfrm>
+            <a:off x="4224528" y="3621024"/>
+            <a:ext cx="3511296" cy="987552"/>
+          </a:xfrm>
+          <a:prstGeom prst="rect">
+            <a:avLst/>
+          </a:prstGeom>
+          <a:solidFill>
+            <a:srgbClr val="F2F4F7"/>
+          </a:solidFill>
+          <a:ln w="8890">
+            <a:solidFill>
+              <a:srgbClr val="D6DAE0"/>
+            </a:solidFill>
+          </a:ln>
+        </p:spPr>
+        <p:style>
+          <a:lnRef idx="1">
+            <a:schemeClr val="accent1"/>
+          </a:lnRef>
+          <a:fillRef idx="3">
+            <a:schemeClr val="accent1"/>
+          </a:fillRef>
+          <a:effectRef idx="2">
+            <a:schemeClr val="accent1"/>
+          </a:effectRef>
+          <a:fontRef idx="minor">
+            <a:schemeClr val="lt1"/>
+          </a:fontRef>
+        </p:style>
+      </p:sp>
+      <p:sp>
+        <p:nvSpPr>
+          <p:cNvPr id="17" name="DENSITY_METRIC_PANEL_1"/>
+          <p:cNvSpPr/>
+          <p:nvPr/>
+        </p:nvSpPr>
+        <p:spPr>
+          <a:xfrm>
+            <a:off x="694944" y="3621024"/>
+            <a:ext cx="3511296" cy="987552"/>
+          </a:xfrm>
+          <a:prstGeom prst="rect">
+            <a:avLst/>
+          </a:prstGeom>
+          <a:solidFill>
+            <a:srgbClr val="F2F4F7"/>
+          </a:solidFill>
+          <a:ln w="8890">
+            <a:solidFill>
+              <a:srgbClr val="D6DAE0"/>
+            </a:solidFill>
+          </a:ln>
+        </p:spPr>
+        <p:style>
+          <a:lnRef idx="1">
+            <a:schemeClr val="accent1"/>
+          </a:lnRef>
+          <a:fillRef idx="3">
+            <a:schemeClr val="accent1"/>
+          </a:fillRef>
+          <a:effectRef idx="2">
+            <a:schemeClr val="accent1"/>
+          </a:effectRef>
+          <a:fontRef idx="minor">
+            <a:schemeClr val="lt1"/>
+          </a:fontRef>
+        </p:style>
+      </p:sp>
+      <p:sp>
+        <p:nvSpPr>
+          <p:cNvPr id="4" name="TextBox 3"/>
+          <p:cNvSpPr txBox="1"/>
+          <p:nvPr/>
+        </p:nvSpPr>
+        <p:spPr>
+          <a:xfrm>
+            <a:off x="2971800" y="100584"/>
+            <a:ext cx="7040880" cy="566928"/>
+          </a:xfrm>
+          <a:prstGeom prst="rect">
+            <a:avLst/>
+          </a:prstGeom>
+          <a:noFill/>
+        </p:spPr>
+        <p:txBody>
+          <a:bodyPr wrap="square">
+            <a:spAutoFit/>
+          </a:bodyPr>
+          <a:lstStyle/>
+          <a:p>
+            <a:pPr algn="l"/>
+            <a:r>
+              <a:rPr sz="2800" b="1">
+                <a:solidFill>
+                  <a:srgbClr val="000000"/>
+                </a:solidFill>
+                <a:latin typeface="Times New Roman"/>
+                <a:ea typeface="Times New Roman"/>
+                <a:cs typeface="Times New Roman"/>
+              </a:rPr>
+              <a:t>Part. 03  实验结果分析</a:t>
+            </a:r>
+          </a:p>
+        </p:txBody>
+      </p:sp>
+      <p:sp>
+        <p:nvSpPr>
+          <p:cNvPr id="5" name="TextBox 4"/>
+          <p:cNvSpPr txBox="1"/>
+          <p:nvPr/>
+        </p:nvSpPr>
+        <p:spPr>
+          <a:xfrm>
+            <a:off x="640080" y="1024128"/>
+            <a:ext cx="7772400" cy="493776"/>
+          </a:xfrm>
+          <a:prstGeom prst="rect">
+            <a:avLst/>
+          </a:prstGeom>
+          <a:noFill/>
+        </p:spPr>
+        <p:txBody>
+          <a:bodyPr wrap="square">
+            <a:spAutoFit/>
+          </a:bodyPr>
+          <a:lstStyle/>
+          <a:p>
+            <a:pPr algn="l"/>
+            <a:r>
+              <a:rPr sz="2000" b="1">
+                <a:solidFill>
+                  <a:srgbClr val="000000"/>
+                </a:solidFill>
+                <a:latin typeface="Times New Roman"/>
+                <a:ea typeface="Times New Roman"/>
+                <a:cs typeface="Times New Roman"/>
+              </a:rPr>
+              <a:t>3.2 Backup 消融分析</a:t>
+            </a:r>
+          </a:p>
+        </p:txBody>
+      </p:sp>
+      <p:sp>
+        <p:nvSpPr>
+          <p:cNvPr id="6" name="TextBox 5"/>
+          <p:cNvSpPr txBox="1"/>
+          <p:nvPr/>
+        </p:nvSpPr>
+        <p:spPr>
+          <a:xfrm>
+            <a:off x="566928" y="1609344"/>
+            <a:ext cx="10972800" cy="1700784"/>
+          </a:xfrm>
+          <a:prstGeom prst="rect">
+            <a:avLst/>
+          </a:prstGeom>
+          <a:noFill/>
+        </p:spPr>
+        <p:txBody>
+          <a:bodyPr wrap="square" lIns="36576" rIns="36576" tIns="18288" bIns="18288" anchor="t"/>
+          <a:lstStyle/>
+          <a:p>
+            <a:pPr algn="l" marL="210000" indent="-140000">
+              <a:lnSpc>
+                <a:spcPct val="102000"/>
+              </a:lnSpc>
+              <a:spcBef>
+                <a:spcPts val="0"/>
+              </a:spcBef>
+              <a:spcAft>
+                <a:spcPts val="200"/>
+              </a:spcAft>
+            </a:pPr>
+            <a:r>
+              <a:rPr sz="1920" b="1" lang="zh-CN">
+                <a:solidFill>
+                  <a:srgbClr val="000000"/>
+                </a:solidFill>
+                <a:latin typeface="Times New Roman"/>
+                <a:ea typeface="Times New Roman"/>
+                <a:cs typeface="Times New Roman"/>
+              </a:rPr>
+              <a:t>● </a:t>
+            </a:r>
+            <a:r>
+              <a:rPr sz="1920" b="1" lang="zh-CN">
+                <a:solidFill>
+                  <a:srgbClr val="DC0000"/>
+                </a:solidFill>
+                <a:latin typeface="Times New Roman"/>
+                <a:ea typeface="Times New Roman"/>
+                <a:cs typeface="Times New Roman"/>
+              </a:rPr>
+              <a:t>backup</a:t>
+            </a:r>
+            <a:r>
+              <a:rPr sz="1920" b="1" lang="zh-CN">
+                <a:solidFill>
+                  <a:srgbClr val="000000"/>
+                </a:solidFill>
+                <a:latin typeface="Times New Roman"/>
+                <a:ea typeface="Times New Roman"/>
+                <a:cs typeface="Times New Roman"/>
+              </a:rPr>
+              <a:t>机制对高动态障碍密度场景贡献最明显。</a:t>
+            </a:r>
+          </a:p>
+          <a:p>
+            <a:pPr>
+              <a:lnSpc>
+                <a:spcPct val="102000"/>
+              </a:lnSpc>
+              <a:spcBef>
+                <a:spcPts val="0"/>
+              </a:spcBef>
+              <a:spcAft>
+                <a:spcPts val="200"/>
+              </a:spcAft>
+            </a:pPr>
+            <a:r>
+              <a:rPr sz="1839" b="0" lang="zh-CN">
+                <a:solidFill>
+                  <a:srgbClr val="000000"/>
+                </a:solidFill>
+                <a:latin typeface="Times New Roman"/>
+                <a:ea typeface="Times New Roman"/>
+                <a:cs typeface="Times New Roman"/>
+              </a:rPr>
+              <a:t>• 10个障碍时，</a:t>
+            </a:r>
+            <a:r>
+              <a:rPr sz="1839" b="1" lang="zh-CN">
+                <a:solidFill>
+                  <a:srgbClr val="DC0000"/>
+                </a:solidFill>
+                <a:latin typeface="Times New Roman"/>
+                <a:ea typeface="Times New Roman"/>
+                <a:cs typeface="Times New Roman"/>
+              </a:rPr>
+              <a:t>SPOT</a:t>
+            </a:r>
+            <a:r>
+              <a:rPr sz="1839" b="0" lang="zh-CN">
+                <a:solidFill>
+                  <a:srgbClr val="000000"/>
+                </a:solidFill>
+                <a:latin typeface="Times New Roman"/>
+                <a:ea typeface="Times New Roman"/>
+                <a:cs typeface="Times New Roman"/>
+              </a:rPr>
+              <a:t>和无</a:t>
+            </a:r>
+            <a:r>
+              <a:rPr sz="1839" b="1" lang="zh-CN">
+                <a:solidFill>
+                  <a:srgbClr val="DC0000"/>
+                </a:solidFill>
+                <a:latin typeface="Times New Roman"/>
+                <a:ea typeface="Times New Roman"/>
+                <a:cs typeface="Times New Roman"/>
+              </a:rPr>
+              <a:t>backup</a:t>
+            </a:r>
+            <a:r>
+              <a:rPr sz="1839" b="0" lang="zh-CN">
+                <a:solidFill>
+                  <a:srgbClr val="000000"/>
+                </a:solidFill>
+                <a:latin typeface="Times New Roman"/>
+                <a:ea typeface="Times New Roman"/>
+                <a:cs typeface="Times New Roman"/>
+              </a:rPr>
+              <a:t>版本成功率接近，差距只有5.8个百分点。</a:t>
+            </a:r>
+          </a:p>
+          <a:p>
+            <a:pPr>
+              <a:lnSpc>
+                <a:spcPct val="102000"/>
+              </a:lnSpc>
+              <a:spcBef>
+                <a:spcPts val="0"/>
+              </a:spcBef>
+              <a:spcAft>
+                <a:spcPts val="200"/>
+              </a:spcAft>
+            </a:pPr>
+            <a:r>
+              <a:rPr sz="1839" b="0" lang="zh-CN">
+                <a:solidFill>
+                  <a:srgbClr val="000000"/>
+                </a:solidFill>
+                <a:latin typeface="Times New Roman"/>
+                <a:ea typeface="Times New Roman"/>
+                <a:cs typeface="Times New Roman"/>
+              </a:rPr>
+              <a:t>• 30个障碍时，无</a:t>
+            </a:r>
+            <a:r>
+              <a:rPr sz="1839" b="1" lang="zh-CN">
+                <a:solidFill>
+                  <a:srgbClr val="DC0000"/>
+                </a:solidFill>
+                <a:latin typeface="Times New Roman"/>
+                <a:ea typeface="Times New Roman"/>
+                <a:cs typeface="Times New Roman"/>
+              </a:rPr>
+              <a:t>backup</a:t>
+            </a:r>
+            <a:r>
+              <a:rPr sz="1839" b="0" lang="zh-CN">
+                <a:solidFill>
+                  <a:srgbClr val="000000"/>
+                </a:solidFill>
+                <a:latin typeface="Times New Roman"/>
+                <a:ea typeface="Times New Roman"/>
+                <a:cs typeface="Times New Roman"/>
+              </a:rPr>
+              <a:t>版本成功率下降到</a:t>
+            </a:r>
+            <a:r>
+              <a:rPr sz="1839" b="1" lang="zh-CN">
+                <a:solidFill>
+                  <a:srgbClr val="DC0000"/>
+                </a:solidFill>
+                <a:latin typeface="Times New Roman"/>
+                <a:ea typeface="Times New Roman"/>
+                <a:cs typeface="Times New Roman"/>
+              </a:rPr>
+              <a:t>52.2%</a:t>
+            </a:r>
+            <a:r>
+              <a:rPr sz="1839" b="0" lang="zh-CN">
+                <a:solidFill>
+                  <a:srgbClr val="000000"/>
+                </a:solidFill>
+                <a:latin typeface="Times New Roman"/>
+                <a:ea typeface="Times New Roman"/>
+                <a:cs typeface="Times New Roman"/>
+              </a:rPr>
+              <a:t>，</a:t>
+            </a:r>
+            <a:r>
+              <a:rPr sz="1839" b="1" lang="zh-CN">
+                <a:solidFill>
+                  <a:srgbClr val="DC0000"/>
+                </a:solidFill>
+                <a:latin typeface="Times New Roman"/>
+                <a:ea typeface="Times New Roman"/>
+                <a:cs typeface="Times New Roman"/>
+              </a:rPr>
+              <a:t>SPOT</a:t>
+            </a:r>
+            <a:r>
+              <a:rPr sz="1839" b="0" lang="zh-CN">
+                <a:solidFill>
+                  <a:srgbClr val="000000"/>
+                </a:solidFill>
+                <a:latin typeface="Times New Roman"/>
+                <a:ea typeface="Times New Roman"/>
+                <a:cs typeface="Times New Roman"/>
+              </a:rPr>
+              <a:t>仍达到</a:t>
+            </a:r>
+            <a:r>
+              <a:rPr sz="1839" b="1" lang="zh-CN">
+                <a:solidFill>
+                  <a:srgbClr val="DC0000"/>
+                </a:solidFill>
+                <a:latin typeface="Times New Roman"/>
+                <a:ea typeface="Times New Roman"/>
+                <a:cs typeface="Times New Roman"/>
+              </a:rPr>
+              <a:t>80.2%</a:t>
+            </a:r>
+            <a:r>
+              <a:rPr sz="1839" b="0" lang="zh-CN">
+                <a:solidFill>
+                  <a:srgbClr val="000000"/>
+                </a:solidFill>
+                <a:latin typeface="Times New Roman"/>
+                <a:ea typeface="Times New Roman"/>
+                <a:cs typeface="Times New Roman"/>
+              </a:rPr>
+              <a:t>。</a:t>
+            </a:r>
+          </a:p>
+          <a:p>
+            <a:pPr>
+              <a:lnSpc>
+                <a:spcPct val="102000"/>
+              </a:lnSpc>
+              <a:spcBef>
+                <a:spcPts val="0"/>
+              </a:spcBef>
+              <a:spcAft>
+                <a:spcPts val="200"/>
+              </a:spcAft>
+            </a:pPr>
+            <a:r>
+              <a:rPr sz="1839" b="0" lang="zh-CN">
+                <a:solidFill>
+                  <a:srgbClr val="000000"/>
+                </a:solidFill>
+                <a:latin typeface="Times New Roman"/>
+                <a:ea typeface="Times New Roman"/>
+                <a:cs typeface="Times New Roman"/>
+              </a:rPr>
+              <a:t>• 无</a:t>
+            </a:r>
+            <a:r>
+              <a:rPr sz="1839" b="1" lang="zh-CN">
+                <a:solidFill>
+                  <a:srgbClr val="DC0000"/>
+                </a:solidFill>
+                <a:latin typeface="Times New Roman"/>
+                <a:ea typeface="Times New Roman"/>
+                <a:cs typeface="Times New Roman"/>
+              </a:rPr>
+              <a:t>backup</a:t>
+            </a:r>
+            <a:r>
+              <a:rPr sz="1839" b="0" lang="zh-CN">
+                <a:solidFill>
+                  <a:srgbClr val="000000"/>
+                </a:solidFill>
+                <a:latin typeface="Times New Roman"/>
+                <a:ea typeface="Times New Roman"/>
+                <a:cs typeface="Times New Roman"/>
+              </a:rPr>
+              <a:t>时UAV可能在目标路径不可达处悬停，更容易与动态障碍碰撞。</a:t>
+            </a:r>
+          </a:p>
+          <a:p>
+            <a:pPr>
+              <a:lnSpc>
+                <a:spcPct val="102000"/>
+              </a:lnSpc>
+              <a:spcBef>
+                <a:spcPts val="0"/>
+              </a:spcBef>
+              <a:spcAft>
+                <a:spcPts val="200"/>
+              </a:spcAft>
+            </a:pPr>
+            <a:r>
+              <a:rPr sz="1839" b="0" lang="zh-CN">
+                <a:solidFill>
+                  <a:srgbClr val="000000"/>
+                </a:solidFill>
+                <a:latin typeface="Times New Roman"/>
+                <a:ea typeface="Times New Roman"/>
+                <a:cs typeface="Times New Roman"/>
+              </a:rPr>
+              <a:t>• 消融表说明</a:t>
+            </a:r>
+            <a:r>
+              <a:rPr sz="1839" b="1" lang="zh-CN">
+                <a:solidFill>
+                  <a:srgbClr val="DC0000"/>
+                </a:solidFill>
+                <a:latin typeface="Times New Roman"/>
+                <a:ea typeface="Times New Roman"/>
+                <a:cs typeface="Times New Roman"/>
+              </a:rPr>
+              <a:t>backup</a:t>
+            </a:r>
+            <a:r>
+              <a:rPr sz="1839" b="0" lang="zh-CN">
+                <a:solidFill>
+                  <a:srgbClr val="000000"/>
+                </a:solidFill>
+                <a:latin typeface="Times New Roman"/>
+                <a:ea typeface="Times New Roman"/>
+                <a:cs typeface="Times New Roman"/>
+              </a:rPr>
+              <a:t>主要承担恢复可行路径和触发重规划的作用。</a:t>
+            </a:r>
+          </a:p>
+        </p:txBody>
+      </p:sp>
+      <p:sp>
+        <p:nvSpPr>
+          <p:cNvPr id="7" name="Rectangle 6"/>
+          <p:cNvSpPr/>
+          <p:nvPr/>
+        </p:nvSpPr>
+        <p:spPr>
+          <a:xfrm>
+            <a:off x="713232" y="3438144"/>
+            <a:ext cx="10771632" cy="18288"/>
+          </a:xfrm>
+          <a:prstGeom prst="rect">
+            <a:avLst/>
+          </a:prstGeom>
+          <a:solidFill>
+            <a:srgbClr val="BEBEBE"/>
+          </a:solidFill>
+          <a:ln>
+            <a:noFill/>
+          </a:ln>
+        </p:spPr>
+        <p:style>
+          <a:lnRef idx="1">
+            <a:schemeClr val="accent1"/>
+          </a:lnRef>
+          <a:fillRef idx="3">
+            <a:schemeClr val="accent1"/>
+          </a:fillRef>
+          <a:effectRef idx="2">
+            <a:schemeClr val="accent1"/>
+          </a:effectRef>
+          <a:fontRef idx="minor">
+            <a:schemeClr val="lt1"/>
+          </a:fontRef>
+        </p:style>
+      </p:sp>
+      <p:sp>
+        <p:nvSpPr>
           <p:cNvPr id="8" name="TextBox 7"/>
           <p:cNvSpPr txBox="1"/>
           <p:nvPr/>
         </p:nvSpPr>
         <p:spPr>
           <a:xfrm>
-            <a:off x="786384" y="4471416"/>
-            <a:ext cx="3419856" cy="384048"/>
+            <a:off x="786384" y="3694176"/>
+            <a:ext cx="3419856" cy="274320"/>
           </a:xfrm>
           <a:prstGeom prst="rect">
             <a:avLst/>
@@ -7950,8 +8168,8 @@
         </p:nvSpPr>
         <p:spPr>
           <a:xfrm>
-            <a:off x="786384" y="4873752"/>
-            <a:ext cx="3419856" cy="256032"/>
+            <a:off x="786384" y="3986784"/>
+            <a:ext cx="3419856" cy="274320"/>
           </a:xfrm>
           <a:prstGeom prst="rect">
             <a:avLst/>
@@ -7997,8 +8215,8 @@
         </p:nvSpPr>
         <p:spPr>
           <a:xfrm>
-            <a:off x="786384" y="5166359"/>
-            <a:ext cx="3419856" cy="310896"/>
+            <a:off x="786384" y="4279392"/>
+            <a:ext cx="3419856" cy="274320"/>
           </a:xfrm>
           <a:prstGeom prst="rect">
             <a:avLst/>
@@ -8044,8 +8262,8 @@
         </p:nvSpPr>
         <p:spPr>
           <a:xfrm>
-            <a:off x="4315968" y="4471416"/>
-            <a:ext cx="3419856" cy="384048"/>
+            <a:off x="4315968" y="3694176"/>
+            <a:ext cx="3419856" cy="274320"/>
           </a:xfrm>
           <a:prstGeom prst="rect">
             <a:avLst/>
@@ -8091,8 +8309,8 @@
         </p:nvSpPr>
         <p:spPr>
           <a:xfrm>
-            <a:off x="4315968" y="4873752"/>
-            <a:ext cx="3419856" cy="256032"/>
+            <a:off x="4315968" y="3986784"/>
+            <a:ext cx="3419856" cy="274320"/>
           </a:xfrm>
           <a:prstGeom prst="rect">
             <a:avLst/>
@@ -8138,8 +8356,8 @@
         </p:nvSpPr>
         <p:spPr>
           <a:xfrm>
-            <a:off x="4315968" y="5166359"/>
-            <a:ext cx="3419856" cy="310896"/>
+            <a:off x="4315968" y="4279392"/>
+            <a:ext cx="3419856" cy="274320"/>
           </a:xfrm>
           <a:prstGeom prst="rect">
             <a:avLst/>
@@ -8185,8 +8403,8 @@
         </p:nvSpPr>
         <p:spPr>
           <a:xfrm>
-            <a:off x="7845552" y="4471416"/>
-            <a:ext cx="3419856" cy="384048"/>
+            <a:off x="7845552" y="3694176"/>
+            <a:ext cx="3419856" cy="274320"/>
           </a:xfrm>
           <a:prstGeom prst="rect">
             <a:avLst/>
@@ -8232,8 +8450,8 @@
         </p:nvSpPr>
         <p:spPr>
           <a:xfrm>
-            <a:off x="7845552" y="4873752"/>
-            <a:ext cx="3419856" cy="256032"/>
+            <a:off x="7845552" y="3986784"/>
+            <a:ext cx="3419856" cy="274320"/>
           </a:xfrm>
           <a:prstGeom prst="rect">
             <a:avLst/>
@@ -8279,8 +8497,8 @@
         </p:nvSpPr>
         <p:spPr>
           <a:xfrm>
-            <a:off x="7845552" y="5166359"/>
-            <a:ext cx="3419856" cy="310896"/>
+            <a:off x="7845552" y="4279392"/>
+            <a:ext cx="3419856" cy="274320"/>
           </a:xfrm>
           <a:prstGeom prst="rect">
             <a:avLst/>
@@ -8314,6 +8532,97 @@
                 <a:cs typeface="Times New Roman"/>
               </a:rPr>
               <a:t>30 障碍密度下</a:t>
+            </a:r>
+          </a:p>
+        </p:txBody>
+      </p:sp>
+      <p:sp>
+        <p:nvSpPr>
+          <p:cNvPr id="20" name="BODY_DENSITY_NOTE"/>
+          <p:cNvSpPr txBox="1"/>
+          <p:nvPr/>
+        </p:nvSpPr>
+        <p:spPr>
+          <a:xfrm>
+            <a:off x="749808" y="5248656"/>
+            <a:ext cx="10716768" cy="713232"/>
+          </a:xfrm>
+          <a:prstGeom prst="rect">
+            <a:avLst/>
+          </a:prstGeom>
+          <a:noFill/>
+        </p:spPr>
+        <p:txBody>
+          <a:bodyPr wrap="square" lIns="36576" rIns="36576" tIns="18288" bIns="18288" anchor="t"/>
+          <a:lstStyle/>
+          <a:p>
+            <a:pPr>
+              <a:lnSpc>
+                <a:spcPct val="102000"/>
+              </a:lnSpc>
+              <a:spcBef>
+                <a:spcPts val="0"/>
+              </a:spcBef>
+              <a:spcAft>
+                <a:spcPts val="200"/>
+              </a:spcAft>
+            </a:pPr>
+            <a:r>
+              <a:rPr sz="1839" b="0" lang="zh-CN">
+                <a:solidFill>
+                  <a:srgbClr val="000000"/>
+                </a:solidFill>
+                <a:latin typeface="Times New Roman"/>
+                <a:ea typeface="Times New Roman"/>
+                <a:cs typeface="Times New Roman"/>
+              </a:rPr>
+              <a:t>• </a:t>
+            </a:r>
+            <a:r>
+              <a:rPr sz="1839" b="1" lang="zh-CN">
+                <a:solidFill>
+                  <a:srgbClr val="DC0000"/>
+                </a:solidFill>
+                <a:latin typeface="Times New Roman"/>
+                <a:ea typeface="Times New Roman"/>
+                <a:cs typeface="Times New Roman"/>
+              </a:rPr>
+              <a:t>backup</a:t>
+            </a:r>
+            <a:r>
+              <a:rPr sz="1839" b="0" lang="zh-CN">
+                <a:solidFill>
+                  <a:srgbClr val="000000"/>
+                </a:solidFill>
+                <a:latin typeface="Times New Roman"/>
+                <a:ea typeface="Times New Roman"/>
+                <a:cs typeface="Times New Roman"/>
+              </a:rPr>
+              <a:t> 主要提升目标路径暂时不可达时的恢复能力，密集动态障碍下收益最明显。</a:t>
+            </a:r>
+          </a:p>
+          <a:p>
+            <a:pPr>
+              <a:lnSpc>
+                <a:spcPct val="102000"/>
+              </a:lnSpc>
+              <a:spcBef>
+                <a:spcPts val="0"/>
+              </a:spcBef>
+              <a:spcAft>
+                <a:spcPts val="200"/>
+              </a:spcAft>
+            </a:pPr>
+            <a:r>
+              <a:rPr sz="1839" b="0" lang="zh-CN">
+                <a:solidFill>
+                  <a:srgbClr val="000000"/>
+                </a:solidFill>
+                <a:latin typeface="Times New Roman"/>
+                <a:ea typeface="Times New Roman"/>
+                <a:cs typeface="Times New Roman"/>
+              </a:rPr>
+              <a:t>• 消融结果说明该模块不是装饰性后处理，而是保证在线规划不断路的关键机制。</a:t>
             </a:r>
           </a:p>
         </p:txBody>
@@ -11869,7 +12178,7 @@
         <p:spPr>
           <a:xfrm>
             <a:off x="530352" y="1609344"/>
-            <a:ext cx="11082528" cy="1938528"/>
+            <a:ext cx="11082528" cy="1901952"/>
           </a:xfrm>
           <a:prstGeom prst="rect">
             <a:avLst/>
@@ -11877,24 +12186,22 @@
           <a:noFill/>
         </p:spPr>
         <p:txBody>
-          <a:bodyPr wrap="square" lIns="0" rIns="0" tIns="0" bIns="0">
-            <a:spAutoFit/>
-          </a:bodyPr>
+          <a:bodyPr wrap="square" lIns="36576" rIns="36576" tIns="18288" bIns="18288" anchor="t"/>
           <a:lstStyle/>
           <a:p>
             <a:pPr algn="l" marL="210000" indent="-140000">
               <a:lnSpc>
-                <a:spcPct val="100000"/>
-              </a:lnSpc>
-              <a:spcBef>
-                <a:spcPts val="0"/>
-              </a:spcBef>
-              <a:spcAft>
-                <a:spcPts val="0"/>
-              </a:spcAft>
-            </a:pPr>
-            <a:r>
-              <a:rPr sz="1920" b="1">
+                <a:spcPct val="102000"/>
+              </a:lnSpc>
+              <a:spcBef>
+                <a:spcPts val="0"/>
+              </a:spcBef>
+              <a:spcAft>
+                <a:spcPts val="200"/>
+              </a:spcAft>
+            </a:pPr>
+            <a:r>
+              <a:rPr sz="1920" b="1" lang="zh-CN">
                 <a:solidFill>
                   <a:srgbClr val="000000"/>
                 </a:solidFill>
@@ -11906,19 +12213,19 @@
             </a:r>
           </a:p>
           <a:p>
-            <a:pPr algn="l" marL="350000" indent="-120000">
-              <a:lnSpc>
-                <a:spcPct val="100000"/>
-              </a:lnSpc>
-              <a:spcBef>
-                <a:spcPts val="0"/>
-              </a:spcBef>
-              <a:spcAft>
-                <a:spcPts val="0"/>
-              </a:spcAft>
-            </a:pPr>
-            <a:r>
-              <a:rPr sz="1840" b="0">
+            <a:pPr>
+              <a:lnSpc>
+                <a:spcPct val="102000"/>
+              </a:lnSpc>
+              <a:spcBef>
+                <a:spcPts val="0"/>
+              </a:spcBef>
+              <a:spcAft>
+                <a:spcPts val="200"/>
+              </a:spcAft>
+            </a:pPr>
+            <a:r>
+              <a:rPr sz="1839" b="0" lang="zh-CN">
                 <a:solidFill>
                   <a:srgbClr val="000000"/>
                 </a:solidFill>
@@ -11929,9 +12236,9 @@
               <a:t>• 任务层可给出目标点、优先级和禁飞约束；</a:t>
             </a:r>
             <a:r>
-              <a:rPr sz="1840" b="1">
-                <a:solidFill>
-                  <a:srgbClr val="FF0000"/>
+              <a:rPr sz="1839" b="1" lang="zh-CN">
+                <a:solidFill>
+                  <a:srgbClr val="DC0000"/>
                 </a:solidFill>
                 <a:latin typeface="Times New Roman"/>
                 <a:ea typeface="Times New Roman"/>
@@ -11940,7 +12247,7 @@
               <a:t>SPOT</a:t>
             </a:r>
             <a:r>
-              <a:rPr sz="1840" b="0">
+              <a:rPr sz="1839" b="0" lang="zh-CN">
                 <a:solidFill>
                   <a:srgbClr val="000000"/>
                 </a:solidFill>
@@ -11952,114 +12259,67 @@
             </a:r>
           </a:p>
           <a:p>
-            <a:pPr algn="l" marL="350000" indent="-120000">
-              <a:lnSpc>
-                <a:spcPct val="100000"/>
-              </a:lnSpc>
-              <a:spcBef>
-                <a:spcPts val="0"/>
-              </a:spcBef>
-              <a:spcAft>
-                <a:spcPts val="0"/>
-              </a:spcAft>
-            </a:pPr>
-            <a:r>
-              <a:rPr sz="1840" b="0">
-                <a:solidFill>
-                  <a:srgbClr val="000000"/>
-                </a:solidFill>
-                <a:latin typeface="Times New Roman"/>
-                <a:ea typeface="Times New Roman"/>
-                <a:cs typeface="Times New Roman"/>
-              </a:rPr>
-              <a:t>• 与语义任务结合时，动⁠态⁠障⁠碍类别、速度和预测可信度可以进入规划代价。</a:t>
-            </a:r>
-          </a:p>
-          <a:p>
-            <a:pPr algn="l" marL="350000" indent="-120000">
-              <a:lnSpc>
-                <a:spcPct val="100000"/>
-              </a:lnSpc>
-              <a:spcBef>
-                <a:spcPts val="0"/>
-              </a:spcBef>
-              <a:spcAft>
-                <a:spcPts val="0"/>
-              </a:spcAft>
-            </a:pPr>
-            <a:r>
-              <a:rPr sz="1840" b="0">
-                <a:solidFill>
-                  <a:srgbClr val="000000"/>
-                </a:solidFill>
-                <a:latin typeface="Times New Roman"/>
-                <a:ea typeface="Times New Roman"/>
-                <a:cs typeface="Times New Roman"/>
-              </a:rPr>
-              <a:t>• 多机系统中可将其他UAV视作动⁠态⁠障⁠碍，但需要补充通信延迟和互相预测机制。</a:t>
-            </a:r>
-          </a:p>
-          <a:p>
-            <a:pPr algn="l" marL="350000" indent="-120000">
-              <a:lnSpc>
-                <a:spcPct val="100000"/>
-              </a:lnSpc>
-              <a:spcBef>
-                <a:spcPts val="0"/>
-              </a:spcBef>
-              <a:spcAft>
-                <a:spcPts val="0"/>
-              </a:spcAft>
-            </a:pPr>
-            <a:r>
-              <a:rPr sz="1840" b="0">
-                <a:solidFill>
-                  <a:srgbClr val="000000"/>
-                </a:solidFill>
-                <a:latin typeface="Times New Roman"/>
-                <a:ea typeface="Times New Roman"/>
-                <a:cs typeface="Times New Roman"/>
-              </a:rPr>
-              <a:t>• 该框架的薄弱环节集中在运动预测、高速动⁠态⁠障⁠碍和多机协调backup策略。</a:t>
-            </a:r>
-          </a:p>
-        </p:txBody>
-      </p:sp>
-      <p:sp>
-        <p:nvSpPr>
-          <p:cNvPr id="7" name="TextBox 6"/>
-          <p:cNvSpPr txBox="1"/>
-          <p:nvPr/>
-        </p:nvSpPr>
-        <p:spPr>
-          <a:xfrm>
-            <a:off x="804672" y="3675887"/>
-            <a:ext cx="10241280" cy="292608"/>
-          </a:xfrm>
-          <a:prstGeom prst="rect">
-            <a:avLst/>
-          </a:prstGeom>
-          <a:noFill/>
-        </p:spPr>
-        <p:txBody>
-          <a:bodyPr wrap="square" lIns="0" rIns="0" tIns="0" bIns="0">
-            <a:spAutoFit/>
-          </a:bodyPr>
-          <a:lstStyle/>
-          <a:p>
-            <a:pPr algn="l" marL="350000" indent="-120000">
-              <a:lnSpc>
-                <a:spcPct val="96000"/>
-              </a:lnSpc>
-              <a:spcBef>
-                <a:spcPts val="0"/>
-              </a:spcBef>
-              <a:spcAft>
-                <a:spcPts val="0"/>
-              </a:spcAft>
-            </a:pPr>
-            <a:r>
-              <a:rPr sz="1840" b="0">
+            <a:pPr>
+              <a:lnSpc>
+                <a:spcPct val="102000"/>
+              </a:lnSpc>
+              <a:spcBef>
+                <a:spcPts val="0"/>
+              </a:spcBef>
+              <a:spcAft>
+                <a:spcPts val="200"/>
+              </a:spcAft>
+            </a:pPr>
+            <a:r>
+              <a:rPr sz="1839" b="0" lang="zh-CN">
+                <a:solidFill>
+                  <a:srgbClr val="000000"/>
+                </a:solidFill>
+                <a:latin typeface="Times New Roman"/>
+                <a:ea typeface="Times New Roman"/>
+                <a:cs typeface="Times New Roman"/>
+              </a:rPr>
+              <a:t>• 与语义任务结合时，动态障碍类别、速度和预测可信度可以进入规划代价。</a:t>
+            </a:r>
+          </a:p>
+          <a:p>
+            <a:pPr>
+              <a:lnSpc>
+                <a:spcPct val="102000"/>
+              </a:lnSpc>
+              <a:spcBef>
+                <a:spcPts val="0"/>
+              </a:spcBef>
+              <a:spcAft>
+                <a:spcPts val="200"/>
+              </a:spcAft>
+            </a:pPr>
+            <a:r>
+              <a:rPr sz="1839" b="0" lang="zh-CN">
+                <a:solidFill>
+                  <a:srgbClr val="000000"/>
+                </a:solidFill>
+                <a:latin typeface="Times New Roman"/>
+                <a:ea typeface="Times New Roman"/>
+                <a:cs typeface="Times New Roman"/>
+              </a:rPr>
+              <a:t>• 多机系统中可将其他 UAV 视作动态障碍，但需要补充通信延迟和互相预测机制。</a:t>
+            </a:r>
+          </a:p>
+          <a:p>
+            <a:pPr>
+              <a:lnSpc>
+                <a:spcPct val="102000"/>
+              </a:lnSpc>
+              <a:spcBef>
+                <a:spcPts val="0"/>
+              </a:spcBef>
+              <a:spcAft>
+                <a:spcPts val="200"/>
+              </a:spcAft>
+            </a:pPr>
+            <a:r>
+              <a:rPr sz="1839" b="0" lang="zh-CN">
                 <a:solidFill>
                   <a:srgbClr val="000000"/>
                 </a:solidFill>
@@ -12080,8 +12340,8 @@
         </p:nvSpPr>
         <p:spPr>
           <a:xfrm>
-            <a:off x="694944" y="4041648"/>
-            <a:ext cx="10789920" cy="16459"/>
+            <a:off x="694944" y="3675887"/>
+            <a:ext cx="10789920" cy="18288"/>
           </a:xfrm>
           <a:prstGeom prst="rect">
             <a:avLst/>
@@ -12116,7 +12376,7 @@
         </p:nvSpPr>
         <p:spPr>
           <a:xfrm>
-            <a:off x="749808" y="4206240"/>
+            <a:off x="749808" y="3840480"/>
             <a:ext cx="3840480" cy="292608"/>
           </a:xfrm>
           <a:prstGeom prst="rect">
@@ -12163,8 +12423,8 @@
         </p:nvSpPr>
         <p:spPr>
           <a:xfrm>
-            <a:off x="676656" y="4535424"/>
-            <a:ext cx="10844784" cy="1627632"/>
+            <a:off x="676656" y="4169663"/>
+            <a:ext cx="10844784" cy="1920240"/>
           </a:xfrm>
           <a:prstGeom prst="rect">
             <a:avLst/>
@@ -12172,9 +12432,7 @@
           <a:noFill/>
         </p:spPr>
         <p:txBody>
-          <a:bodyPr wrap="square" lIns="0" rIns="0" tIns="0" bIns="0">
-            <a:spAutoFit/>
-          </a:bodyPr>
+          <a:bodyPr wrap="square" lIns="36576" rIns="36576" tIns="18288" bIns="18288" anchor="t"/>
           <a:lstStyle/>
           <a:p>
             <a:pPr algn="l" marL="350000" indent="-120000">
@@ -12185,23 +12443,23 @@
                 <a:spcPts val="0"/>
               </a:spcBef>
               <a:spcAft>
-                <a:spcPts val="0"/>
-              </a:spcAft>
-            </a:pPr>
-            <a:r>
-              <a:rPr sz="1840" b="0">
-                <a:solidFill>
-                  <a:srgbClr val="000000"/>
-                </a:solidFill>
-                <a:latin typeface="Times New Roman"/>
-                <a:ea typeface="Times New Roman"/>
-                <a:cs typeface="Times New Roman"/>
-              </a:rPr>
-              <a:t>• 无地图时⁠空⁠规⁠划减少地图维护成本，但更依赖实时视觉检测和短期预测稳定性。</a:t>
-            </a:r>
-          </a:p>
-          <a:p>
-            <a:pPr algn="l" marL="350000" indent="-120000">
+                <a:spcPts val="200"/>
+              </a:spcAft>
+            </a:pPr>
+            <a:r>
+              <a:rPr sz="1839" b="0" lang="zh-CN">
+                <a:solidFill>
+                  <a:srgbClr val="000000"/>
+                </a:solidFill>
+                <a:latin typeface="Times New Roman"/>
+                <a:ea typeface="Times New Roman"/>
+                <a:cs typeface="Times New Roman"/>
+              </a:rPr>
+              <a:t>• 无地图时空规划减少地图维护成本，但更依赖实时视觉检测和短期预测稳定性。</a:t>
+            </a:r>
+          </a:p>
+          <a:p>
+            <a:pPr>
               <a:lnSpc>
                 <a:spcPct val="102000"/>
               </a:lnSpc>
@@ -12209,11 +12467,11 @@
                 <a:spcPts val="0"/>
               </a:spcBef>
               <a:spcAft>
-                <a:spcPts val="0"/>
-              </a:spcAft>
-            </a:pPr>
-            <a:r>
-              <a:rPr sz="1840" b="0">
+                <a:spcPts val="200"/>
+              </a:spcAft>
+            </a:pPr>
+            <a:r>
+              <a:rPr sz="1839" b="0" lang="zh-CN">
                 <a:solidFill>
                   <a:srgbClr val="000000"/>
                 </a:solidFill>
@@ -12225,7 +12483,7 @@
             </a:r>
           </a:p>
           <a:p>
-            <a:pPr algn="l" marL="350000" indent="-120000">
+            <a:pPr>
               <a:lnSpc>
                 <a:spcPct val="102000"/>
               </a:lnSpc>
@@ -12233,11 +12491,11 @@
                 <a:spcPts val="0"/>
               </a:spcBef>
               <a:spcAft>
-                <a:spcPts val="0"/>
-              </a:spcAft>
-            </a:pPr>
-            <a:r>
-              <a:rPr sz="1840" b="0">
+                <a:spcPts val="200"/>
+              </a:spcAft>
+            </a:pPr>
+            <a:r>
+              <a:rPr sz="1839" b="0" lang="zh-CN">
                 <a:solidFill>
                   <a:srgbClr val="000000"/>
                 </a:solidFill>
@@ -12249,7 +12507,7 @@
             </a:r>
           </a:p>
           <a:p>
-            <a:pPr algn="l" marL="350000" indent="-120000">
+            <a:pPr>
               <a:lnSpc>
                 <a:spcPct val="102000"/>
               </a:lnSpc>
@@ -12257,19 +12515,65 @@
                 <a:spcPts val="0"/>
               </a:spcBef>
               <a:spcAft>
-                <a:spcPts val="0"/>
-              </a:spcAft>
-            </a:pPr>
-            <a:r>
-              <a:rPr sz="1840" b="0">
-                <a:solidFill>
-                  <a:srgbClr val="000000"/>
-                </a:solidFill>
-                <a:latin typeface="Times New Roman"/>
-                <a:ea typeface="Times New Roman"/>
-                <a:cs typeface="Times New Roman"/>
-              </a:rPr>
-              <a:t>• 多机任务中还需要把通信延迟、互相预测误差和backup优先级纳入统一调度。</a:t>
+                <a:spcPts val="200"/>
+              </a:spcAft>
+            </a:pPr>
+            <a:r>
+              <a:rPr sz="1839" b="0" lang="zh-CN">
+                <a:solidFill>
+                  <a:srgbClr val="000000"/>
+                </a:solidFill>
+                <a:latin typeface="Times New Roman"/>
+                <a:ea typeface="Times New Roman"/>
+                <a:cs typeface="Times New Roman"/>
+              </a:rPr>
+              <a:t>• 多机任务中还需要把通信延迟、互相预测误差和</a:t>
+            </a:r>
+            <a:r>
+              <a:rPr sz="1839" b="1" lang="zh-CN">
+                <a:solidFill>
+                  <a:srgbClr val="DC0000"/>
+                </a:solidFill>
+                <a:latin typeface="Times New Roman"/>
+                <a:ea typeface="Times New Roman"/>
+                <a:cs typeface="Times New Roman"/>
+              </a:rPr>
+              <a:t>backup</a:t>
+            </a:r>
+            <a:r>
+              <a:rPr sz="1839" b="0" lang="zh-CN">
+                <a:solidFill>
+                  <a:srgbClr val="000000"/>
+                </a:solidFill>
+                <a:latin typeface="Times New Roman"/>
+                <a:ea typeface="Times New Roman"/>
+                <a:cs typeface="Times New Roman"/>
+              </a:rPr>
+              <a:t>优先级纳入统一调度。</a:t>
+            </a:r>
+          </a:p>
+          <a:p>
+            <a:pPr>
+              <a:lnSpc>
+                <a:spcPct val="102000"/>
+              </a:lnSpc>
+              <a:spcBef>
+                <a:spcPts val="0"/>
+              </a:spcBef>
+              <a:spcAft>
+                <a:spcPts val="200"/>
+              </a:spcAft>
+            </a:pPr>
+            <a:r>
+              <a:rPr sz="1839" b="0" lang="zh-CN">
+                <a:solidFill>
+                  <a:srgbClr val="000000"/>
+                </a:solidFill>
+                <a:latin typeface="Times New Roman"/>
+                <a:ea typeface="Times New Roman"/>
+                <a:cs typeface="Times New Roman"/>
+              </a:rPr>
+              <a:t>• 工程实现还包含短时预测失效时的降级策略，保证局部重规划连续运行。</a:t>
             </a:r>
           </a:p>
         </p:txBody>
@@ -12902,263 +13206,25 @@
       </p:pic>
       <p:sp>
         <p:nvSpPr>
-          <p:cNvPr id="4" name="TextBox 3"/>
-          <p:cNvSpPr txBox="1"/>
-          <p:nvPr/>
-        </p:nvSpPr>
-        <p:spPr>
-          <a:xfrm>
-            <a:off x="2971800" y="100584"/>
-            <a:ext cx="7040880" cy="566928"/>
-          </a:xfrm>
-          <a:prstGeom prst="rect">
-            <a:avLst/>
-          </a:prstGeom>
-          <a:noFill/>
-        </p:spPr>
-        <p:txBody>
-          <a:bodyPr wrap="square">
-            <a:spAutoFit/>
-          </a:bodyPr>
-          <a:lstStyle/>
-          <a:p>
-            <a:pPr algn="l"/>
-            <a:r>
-              <a:rPr sz="2800" b="1">
-                <a:solidFill>
-                  <a:srgbClr val="000000"/>
-                </a:solidFill>
-                <a:latin typeface="Times New Roman"/>
-                <a:ea typeface="Times New Roman"/>
-                <a:cs typeface="Times New Roman"/>
-              </a:rPr>
-              <a:t>Part. 01  研究背景及动机</a:t>
-            </a:r>
-          </a:p>
-        </p:txBody>
-      </p:sp>
-      <p:sp>
-        <p:nvSpPr>
-          <p:cNvPr id="5" name="TextBox 4"/>
-          <p:cNvSpPr txBox="1"/>
-          <p:nvPr/>
-        </p:nvSpPr>
-        <p:spPr>
-          <a:xfrm>
-            <a:off x="640080" y="1024128"/>
-            <a:ext cx="7772400" cy="493776"/>
-          </a:xfrm>
-          <a:prstGeom prst="rect">
-            <a:avLst/>
-          </a:prstGeom>
-          <a:noFill/>
-        </p:spPr>
-        <p:txBody>
-          <a:bodyPr wrap="square">
-            <a:spAutoFit/>
-          </a:bodyPr>
-          <a:lstStyle/>
-          <a:p>
-            <a:pPr algn="l"/>
-            <a:r>
-              <a:rPr sz="2000" b="1">
-                <a:solidFill>
-                  <a:srgbClr val="000000"/>
-                </a:solidFill>
-                <a:latin typeface="Times New Roman"/>
-                <a:ea typeface="Times New Roman"/>
-                <a:cs typeface="Times New Roman"/>
-              </a:rPr>
-              <a:t>1.3 现有方法局限</a:t>
-            </a:r>
-          </a:p>
-        </p:txBody>
-      </p:sp>
-      <p:sp>
-        <p:nvSpPr>
-          <p:cNvPr id="6" name="TextBox 5"/>
-          <p:cNvSpPr txBox="1"/>
-          <p:nvPr/>
-        </p:nvSpPr>
-        <p:spPr>
-          <a:xfrm>
-            <a:off x="694944" y="1591056"/>
-            <a:ext cx="4754880" cy="292608"/>
-          </a:xfrm>
-          <a:prstGeom prst="rect">
-            <a:avLst/>
-          </a:prstGeom>
-          <a:noFill/>
-        </p:spPr>
-        <p:txBody>
-          <a:bodyPr wrap="square" lIns="0" rIns="0" tIns="0" bIns="0">
-            <a:spAutoFit/>
-          </a:bodyPr>
-          <a:lstStyle/>
-          <a:p>
-            <a:pPr algn="l">
-              <a:lnSpc>
-                <a:spcPct val="100000"/>
-              </a:lnSpc>
-              <a:spcBef>
-                <a:spcPts val="0"/>
-              </a:spcBef>
-              <a:spcAft>
-                <a:spcPts val="0"/>
-              </a:spcAft>
-            </a:pPr>
-            <a:r>
-              <a:rPr sz="1900" b="1">
-                <a:solidFill>
-                  <a:srgbClr val="4E4E4E"/>
-                </a:solidFill>
-                <a:latin typeface="Times New Roman"/>
-                <a:ea typeface="Times New Roman"/>
-                <a:cs typeface="Times New Roman"/>
-              </a:rPr>
-              <a:t>静态 SFC 路线</a:t>
-            </a:r>
-          </a:p>
-        </p:txBody>
-      </p:sp>
-      <p:sp>
-        <p:nvSpPr>
-          <p:cNvPr id="7" name="TextBox 6"/>
-          <p:cNvSpPr txBox="1"/>
-          <p:nvPr/>
-        </p:nvSpPr>
-        <p:spPr>
-          <a:xfrm>
-            <a:off x="658368" y="1920240"/>
-            <a:ext cx="10899648" cy="1828800"/>
-          </a:xfrm>
-          <a:prstGeom prst="rect">
-            <a:avLst/>
-          </a:prstGeom>
-          <a:noFill/>
-        </p:spPr>
-        <p:txBody>
-          <a:bodyPr wrap="square" lIns="0" rIns="0" tIns="0" bIns="0">
-            <a:spAutoFit/>
-          </a:bodyPr>
-          <a:lstStyle/>
-          <a:p>
-            <a:pPr algn="l" marL="210000" indent="-140000">
-              <a:lnSpc>
-                <a:spcPct val="105000"/>
-              </a:lnSpc>
-              <a:spcBef>
-                <a:spcPts val="0"/>
-              </a:spcBef>
-              <a:spcAft>
-                <a:spcPts val="55"/>
-              </a:spcAft>
-            </a:pPr>
-            <a:r>
-              <a:rPr sz="1920" b="1">
-                <a:solidFill>
-                  <a:srgbClr val="000000"/>
-                </a:solidFill>
-                <a:latin typeface="Times New Roman"/>
-                <a:ea typeface="Times New Roman"/>
-                <a:cs typeface="Times New Roman"/>
-              </a:rPr>
-              <a:t>● 先由全局路径生成凸多面体走廊，再在走廊内优化轨迹。</a:t>
-            </a:r>
-          </a:p>
-          <a:p>
-            <a:pPr algn="l" marL="350000" indent="-120000">
-              <a:lnSpc>
-                <a:spcPct val="105000"/>
-              </a:lnSpc>
-              <a:spcBef>
-                <a:spcPts val="0"/>
-              </a:spcBef>
-              <a:spcAft>
-                <a:spcPts val="55"/>
-              </a:spcAft>
-            </a:pPr>
-            <a:r>
-              <a:rPr sz="1840" b="0">
-                <a:solidFill>
-                  <a:srgbClr val="000000"/>
-                </a:solidFill>
-                <a:latin typeface="Times New Roman"/>
-                <a:ea typeface="Times New Roman"/>
-                <a:cs typeface="Times New Roman"/>
-              </a:rPr>
-              <a:t>• 对静态障碍适用，但没有显式处理未来时刻的动态占用。</a:t>
-            </a:r>
-          </a:p>
-          <a:p>
-            <a:pPr algn="l" marL="350000" indent="-120000">
-              <a:lnSpc>
-                <a:spcPct val="105000"/>
-              </a:lnSpc>
-              <a:spcBef>
-                <a:spcPts val="0"/>
-              </a:spcBef>
-              <a:spcAft>
-                <a:spcPts val="55"/>
-              </a:spcAft>
-            </a:pPr>
-            <a:r>
-              <a:rPr sz="1840" b="0">
-                <a:solidFill>
-                  <a:srgbClr val="000000"/>
-                </a:solidFill>
-                <a:latin typeface="Times New Roman"/>
-                <a:ea typeface="Times New Roman"/>
-                <a:cs typeface="Times New Roman"/>
-              </a:rPr>
-              <a:t>• 若只把动⁠态⁠障⁠碍作为优化约束，高密度场景中容易产生不可行或保守解。</a:t>
-            </a:r>
-          </a:p>
-          <a:p>
-            <a:pPr algn="l" marL="350000" indent="-120000">
-              <a:lnSpc>
-                <a:spcPct val="105000"/>
-              </a:lnSpc>
-              <a:spcBef>
-                <a:spcPts val="0"/>
-              </a:spcBef>
-              <a:spcAft>
-                <a:spcPts val="55"/>
-              </a:spcAft>
-            </a:pPr>
-            <a:r>
-              <a:rPr sz="1840" b="0">
-                <a:solidFill>
-                  <a:srgbClr val="000000"/>
-                </a:solidFill>
-                <a:latin typeface="Times New Roman"/>
-                <a:ea typeface="Times New Roman"/>
-                <a:cs typeface="Times New Roman"/>
-              </a:rPr>
-              <a:t>• 走廊本身如果没有时间属性，障碍“稍后进入走廊”的风险很难提前排除。</a:t>
-            </a:r>
-          </a:p>
-        </p:txBody>
-      </p:sp>
-      <p:sp>
-        <p:nvSpPr>
-          <p:cNvPr id="8" name="Rectangle 7"/>
+          <p:cNvPr id="11" name="DENSITY_COMPARE_PANEL"/>
           <p:cNvSpPr/>
           <p:nvPr/>
         </p:nvSpPr>
         <p:spPr>
           <a:xfrm>
-            <a:off x="694944" y="3822191"/>
-            <a:ext cx="10808208" cy="16459"/>
+            <a:off x="713232" y="5486400"/>
+            <a:ext cx="10771632" cy="566928"/>
           </a:xfrm>
           <a:prstGeom prst="rect">
             <a:avLst/>
           </a:prstGeom>
           <a:solidFill>
-            <a:srgbClr val="BEBEBE"/>
+            <a:srgbClr val="F2F4F7"/>
           </a:solidFill>
-          <a:ln>
-            <a:noFill/>
+          <a:ln w="8890">
+            <a:solidFill>
+              <a:srgbClr val="D6DAE0"/>
+            </a:solidFill>
           </a:ln>
         </p:spPr>
         <p:style>
@@ -13178,14 +13244,88 @@
       </p:sp>
       <p:sp>
         <p:nvSpPr>
-          <p:cNvPr id="9" name="TextBox 8"/>
+          <p:cNvPr id="4" name="TextBox 3"/>
           <p:cNvSpPr txBox="1"/>
           <p:nvPr/>
         </p:nvSpPr>
         <p:spPr>
           <a:xfrm>
-            <a:off x="694944" y="3986784"/>
-            <a:ext cx="4754880" cy="292608"/>
+            <a:off x="2971800" y="100584"/>
+            <a:ext cx="7040880" cy="566928"/>
+          </a:xfrm>
+          <a:prstGeom prst="rect">
+            <a:avLst/>
+          </a:prstGeom>
+          <a:noFill/>
+        </p:spPr>
+        <p:txBody>
+          <a:bodyPr wrap="square">
+            <a:spAutoFit/>
+          </a:bodyPr>
+          <a:lstStyle/>
+          <a:p>
+            <a:pPr algn="l"/>
+            <a:r>
+              <a:rPr sz="2800" b="1">
+                <a:solidFill>
+                  <a:srgbClr val="000000"/>
+                </a:solidFill>
+                <a:latin typeface="Times New Roman"/>
+                <a:ea typeface="Times New Roman"/>
+                <a:cs typeface="Times New Roman"/>
+              </a:rPr>
+              <a:t>Part. 01  研究背景及动机</a:t>
+            </a:r>
+          </a:p>
+        </p:txBody>
+      </p:sp>
+      <p:sp>
+        <p:nvSpPr>
+          <p:cNvPr id="5" name="TextBox 4"/>
+          <p:cNvSpPr txBox="1"/>
+          <p:nvPr/>
+        </p:nvSpPr>
+        <p:spPr>
+          <a:xfrm>
+            <a:off x="640080" y="1024128"/>
+            <a:ext cx="7772400" cy="493776"/>
+          </a:xfrm>
+          <a:prstGeom prst="rect">
+            <a:avLst/>
+          </a:prstGeom>
+          <a:noFill/>
+        </p:spPr>
+        <p:txBody>
+          <a:bodyPr wrap="square">
+            <a:spAutoFit/>
+          </a:bodyPr>
+          <a:lstStyle/>
+          <a:p>
+            <a:pPr algn="l"/>
+            <a:r>
+              <a:rPr sz="2000" b="1">
+                <a:solidFill>
+                  <a:srgbClr val="000000"/>
+                </a:solidFill>
+                <a:latin typeface="Times New Roman"/>
+                <a:ea typeface="Times New Roman"/>
+                <a:cs typeface="Times New Roman"/>
+              </a:rPr>
+              <a:t>1.3 现有方法局限</a:t>
+            </a:r>
+          </a:p>
+        </p:txBody>
+      </p:sp>
+      <p:sp>
+        <p:nvSpPr>
+          <p:cNvPr id="6" name="TextBox 5"/>
+          <p:cNvSpPr txBox="1"/>
+          <p:nvPr/>
+        </p:nvSpPr>
+        <p:spPr>
+          <a:xfrm>
+            <a:off x="694944" y="1591056"/>
+            <a:ext cx="5029200" cy="292608"/>
           </a:xfrm>
           <a:prstGeom prst="rect">
             <a:avLst/>
@@ -13218,21 +13358,21 @@
                 <a:ea typeface="Times New Roman"/>
                 <a:cs typeface="Times New Roman"/>
               </a:rPr>
-              <a:t>动态规划路线</a:t>
-            </a:r>
-          </a:p>
-        </p:txBody>
-      </p:sp>
-      <p:sp>
-        <p:nvSpPr>
-          <p:cNvPr id="10" name="TextBox 9"/>
+              <a:t>静态 SFC 路线</a:t>
+            </a:r>
+          </a:p>
+        </p:txBody>
+      </p:sp>
+      <p:sp>
+        <p:nvSpPr>
+          <p:cNvPr id="7" name="TextBox 6"/>
           <p:cNvSpPr txBox="1"/>
           <p:nvPr/>
         </p:nvSpPr>
         <p:spPr>
           <a:xfrm>
-            <a:off x="658368" y="4315968"/>
-            <a:ext cx="10899648" cy="1865376"/>
+            <a:off x="658368" y="1901952"/>
+            <a:ext cx="5212080" cy="3401568"/>
           </a:xfrm>
           <a:prstGeom prst="rect">
             <a:avLst/>
@@ -13265,6 +13405,208 @@
                 <a:ea typeface="Times New Roman"/>
                 <a:cs typeface="Times New Roman"/>
               </a:rPr>
+              <a:t>● 先由全局路径生成凸多面体走廊，再在走廊内优化轨迹。</a:t>
+            </a:r>
+          </a:p>
+          <a:p>
+            <a:pPr algn="l" marL="350000" indent="-120000">
+              <a:lnSpc>
+                <a:spcPct val="105000"/>
+              </a:lnSpc>
+              <a:spcBef>
+                <a:spcPts val="0"/>
+              </a:spcBef>
+              <a:spcAft>
+                <a:spcPts val="55"/>
+              </a:spcAft>
+            </a:pPr>
+            <a:r>
+              <a:rPr sz="1840" b="0">
+                <a:solidFill>
+                  <a:srgbClr val="000000"/>
+                </a:solidFill>
+                <a:latin typeface="Times New Roman"/>
+                <a:ea typeface="Times New Roman"/>
+                <a:cs typeface="Times New Roman"/>
+              </a:rPr>
+              <a:t>• 对静态障碍适用，但没有显式处理未来时刻的动态占用。</a:t>
+            </a:r>
+          </a:p>
+          <a:p>
+            <a:pPr algn="l" marL="350000" indent="-120000">
+              <a:lnSpc>
+                <a:spcPct val="105000"/>
+              </a:lnSpc>
+              <a:spcBef>
+                <a:spcPts val="0"/>
+              </a:spcBef>
+              <a:spcAft>
+                <a:spcPts val="55"/>
+              </a:spcAft>
+            </a:pPr>
+            <a:r>
+              <a:rPr sz="1840" b="0">
+                <a:solidFill>
+                  <a:srgbClr val="000000"/>
+                </a:solidFill>
+                <a:latin typeface="Times New Roman"/>
+                <a:ea typeface="Times New Roman"/>
+                <a:cs typeface="Times New Roman"/>
+              </a:rPr>
+              <a:t>• 若只把动⁠态⁠障⁠碍作为优化约束，高密度场景中容易产生不可行或保守解。</a:t>
+            </a:r>
+          </a:p>
+          <a:p>
+            <a:pPr algn="l" marL="350000" indent="-120000">
+              <a:lnSpc>
+                <a:spcPct val="105000"/>
+              </a:lnSpc>
+              <a:spcBef>
+                <a:spcPts val="0"/>
+              </a:spcBef>
+              <a:spcAft>
+                <a:spcPts val="55"/>
+              </a:spcAft>
+            </a:pPr>
+            <a:r>
+              <a:rPr sz="1840" b="0">
+                <a:solidFill>
+                  <a:srgbClr val="000000"/>
+                </a:solidFill>
+                <a:latin typeface="Times New Roman"/>
+                <a:ea typeface="Times New Roman"/>
+                <a:cs typeface="Times New Roman"/>
+              </a:rPr>
+              <a:t>• 走廊本身如果没有时间属性，障碍“稍后进入走廊”的风险很难提前排除。</a:t>
+            </a:r>
+          </a:p>
+        </p:txBody>
+      </p:sp>
+      <p:sp>
+        <p:nvSpPr>
+          <p:cNvPr id="8" name="Rectangle 7"/>
+          <p:cNvSpPr/>
+          <p:nvPr/>
+        </p:nvSpPr>
+        <p:spPr>
+          <a:xfrm>
+            <a:off x="5998464" y="1700784"/>
+            <a:ext cx="18288" cy="4114800"/>
+          </a:xfrm>
+          <a:prstGeom prst="rect">
+            <a:avLst/>
+          </a:prstGeom>
+          <a:solidFill>
+            <a:srgbClr val="BEBEBE"/>
+          </a:solidFill>
+          <a:ln>
+            <a:noFill/>
+          </a:ln>
+        </p:spPr>
+        <p:style>
+          <a:lnRef idx="1">
+            <a:schemeClr val="accent1"/>
+          </a:lnRef>
+          <a:fillRef idx="3">
+            <a:schemeClr val="accent1"/>
+          </a:fillRef>
+          <a:effectRef idx="2">
+            <a:schemeClr val="accent1"/>
+          </a:effectRef>
+          <a:fontRef idx="minor">
+            <a:schemeClr val="lt1"/>
+          </a:fontRef>
+        </p:style>
+      </p:sp>
+      <p:sp>
+        <p:nvSpPr>
+          <p:cNvPr id="9" name="TextBox 8"/>
+          <p:cNvSpPr txBox="1"/>
+          <p:nvPr/>
+        </p:nvSpPr>
+        <p:spPr>
+          <a:xfrm>
+            <a:off x="6236208" y="1591056"/>
+            <a:ext cx="5029200" cy="292608"/>
+          </a:xfrm>
+          <a:prstGeom prst="rect">
+            <a:avLst/>
+          </a:prstGeom>
+          <a:noFill/>
+        </p:spPr>
+        <p:txBody>
+          <a:bodyPr wrap="square" lIns="0" rIns="0" tIns="0" bIns="0">
+            <a:spAutoFit/>
+          </a:bodyPr>
+          <a:lstStyle/>
+          <a:p>
+            <a:pPr algn="l">
+              <a:lnSpc>
+                <a:spcPct val="100000"/>
+              </a:lnSpc>
+              <a:spcBef>
+                <a:spcPts val="0"/>
+              </a:spcBef>
+              <a:spcAft>
+                <a:spcPts val="0"/>
+              </a:spcAft>
+            </a:pPr>
+            <a:r>
+              <a:rPr sz="1900" b="1">
+                <a:solidFill>
+                  <a:srgbClr val="4E4E4E"/>
+                </a:solidFill>
+                <a:latin typeface="Times New Roman"/>
+                <a:ea typeface="Times New Roman"/>
+                <a:cs typeface="Times New Roman"/>
+              </a:rPr>
+              <a:t>动态规划路线</a:t>
+            </a:r>
+          </a:p>
+        </p:txBody>
+      </p:sp>
+      <p:sp>
+        <p:nvSpPr>
+          <p:cNvPr id="10" name="TextBox 9"/>
+          <p:cNvSpPr txBox="1"/>
+          <p:nvPr/>
+        </p:nvSpPr>
+        <p:spPr>
+          <a:xfrm>
+            <a:off x="6199632" y="1901952"/>
+            <a:ext cx="5230368" cy="3401568"/>
+          </a:xfrm>
+          <a:prstGeom prst="rect">
+            <a:avLst/>
+          </a:prstGeom>
+          <a:noFill/>
+        </p:spPr>
+        <p:txBody>
+          <a:bodyPr wrap="square" lIns="0" rIns="0" tIns="0" bIns="0">
+            <a:spAutoFit/>
+          </a:bodyPr>
+          <a:lstStyle/>
+          <a:p>
+            <a:pPr algn="l" marL="210000" indent="-140000">
+              <a:lnSpc>
+                <a:spcPct val="105000"/>
+              </a:lnSpc>
+              <a:spcBef>
+                <a:spcPts val="0"/>
+              </a:spcBef>
+              <a:spcAft>
+                <a:spcPts val="55"/>
+              </a:spcAft>
+            </a:pPr>
+            <a:r>
+              <a:rPr sz="1920" b="1">
+                <a:solidFill>
+                  <a:srgbClr val="000000"/>
+                </a:solidFill>
+                <a:latin typeface="Times New Roman"/>
+                <a:ea typeface="Times New Roman"/>
+                <a:cs typeface="Times New Roman"/>
+              </a:rPr>
               <a:t>● 部分方法需要运动捕捉或较准确的全局动⁠态⁠障⁠碍轨迹。</a:t>
             </a:r>
           </a:p>
@@ -13338,6 +13680,51 @@
                 <a:cs typeface="Times New Roman"/>
               </a:rPr>
               <a:t>• 在机载视觉条件下，有⁠限⁠视⁠场和遮挡还会放大动⁠态⁠障⁠碍预测误差。</a:t>
+            </a:r>
+          </a:p>
+        </p:txBody>
+      </p:sp>
+      <p:sp>
+        <p:nvSpPr>
+          <p:cNvPr id="12" name="BODY_DENSITY_COMPARE"/>
+          <p:cNvSpPr txBox="1"/>
+          <p:nvPr/>
+        </p:nvSpPr>
+        <p:spPr>
+          <a:xfrm>
+            <a:off x="896112" y="5596128"/>
+            <a:ext cx="10387584" cy="438912"/>
+          </a:xfrm>
+          <a:prstGeom prst="rect">
+            <a:avLst/>
+          </a:prstGeom>
+          <a:noFill/>
+        </p:spPr>
+        <p:txBody>
+          <a:bodyPr wrap="square" lIns="36576" rIns="36576" tIns="18288" bIns="18288" anchor="t"/>
+          <a:lstStyle/>
+          <a:p>
+            <a:pPr>
+              <a:lnSpc>
+                <a:spcPct val="102000"/>
+              </a:lnSpc>
+              <a:spcBef>
+                <a:spcPts val="0"/>
+              </a:spcBef>
+              <a:spcAft>
+                <a:spcPts val="200"/>
+              </a:spcAft>
+            </a:pPr>
+            <a:r>
+              <a:rPr sz="1839" b="0" lang="zh-CN">
+                <a:solidFill>
+                  <a:srgbClr val="000000"/>
+                </a:solidFill>
+                <a:latin typeface="Times New Roman"/>
+                <a:ea typeface="Times New Roman"/>
+                <a:cs typeface="Times New Roman"/>
+              </a:rPr>
+              <a:t>• SPOT的改进点在于把动态障碍的未来占用写入时空走廊，同时保留目标路径不可达时的backup恢复机制。</a:t>
             </a:r>
           </a:p>
         </p:txBody>
